--- a/module-03-grid-driving/slides/02-driving-multiple-intersections.pptx
+++ b/module-03-grid-driving/slides/02-driving-multiple-intersections.pptx
@@ -5,18 +5,18 @@
     <p:sldMasterId id="2147483648" r:id="rId1"/>
   </p:sldMasterIdLst>
   <p:sldIdLst>
-    <p:sldId id="256" r:id="rId2"/>
-    <p:sldId id="257" r:id="rId3"/>
-    <p:sldId id="267" r:id="rId4"/>
-    <p:sldId id="270" r:id="rId5"/>
-    <p:sldId id="271" r:id="rId6"/>
-    <p:sldId id="272" r:id="rId7"/>
-    <p:sldId id="262" r:id="rId8"/>
-    <p:sldId id="273" r:id="rId9"/>
-    <p:sldId id="264" r:id="rId10"/>
-    <p:sldId id="265" r:id="rId11"/>
+    <p:sldId id="256" r:id="rId7"/>
+    <p:sldId id="257" r:id="rId8"/>
+    <p:sldId id="258" r:id="rId9"/>
+    <p:sldId id="259" r:id="rId10"/>
+    <p:sldId id="260" r:id="rId11"/>
+    <p:sldId id="261" r:id="rId12"/>
+    <p:sldId id="262" r:id="rId13"/>
+    <p:sldId id="263" r:id="rId14"/>
+    <p:sldId id="264" r:id="rId15"/>
+    <p:sldId id="265" r:id="rId16"/>
   </p:sldIdLst>
-  <p:sldSz cx="12192000" cy="6858000"/>
+  <p:sldSz cx="12191695" cy="6858000" type="screen4x3"/>
   <p:notesSz cx="6858000" cy="9144000"/>
   <p:defaultTextStyle>
     <a:defPPr>
@@ -113,22 +113,6 @@
       </a:defRPr>
     </a:lvl9pPr>
   </p:defaultTextStyle>
-  <p:extLst>
-    <p:ext uri="{EFAFB233-063F-42B5-8137-9DF3F51BA10A}">
-      <p15:sldGuideLst xmlns:p15="http://schemas.microsoft.com/office/powerpoint/2012/main">
-        <p15:guide id="1" orient="horz" pos="2160">
-          <p15:clr>
-            <a:srgbClr val="A4A3A4"/>
-          </p15:clr>
-        </p15:guide>
-        <p15:guide id="2" pos="2880">
-          <p15:clr>
-            <a:srgbClr val="A4A3A4"/>
-          </p15:clr>
-        </p15:guide>
-      </p15:sldGuideLst>
-    </p:ext>
-  </p:extLst>
 </p:presentation>
 </file>
 
@@ -170,9 +154,10 @@
           <a:lstStyle/>
           <a:p>
             <a:r>
-              <a:rPr lang="en-US"/>
+              <a:rPr lang="en-US" smtClean="0"/>
               <a:t>Click to edit Master title style</a:t>
             </a:r>
+            <a:endParaRPr lang="en-US"/>
           </a:p>
         </p:txBody>
       </p:sp>
@@ -288,9 +273,10 @@
           </a:lstStyle>
           <a:p>
             <a:r>
-              <a:rPr lang="en-US"/>
+              <a:rPr lang="en-US" smtClean="0"/>
               <a:t>Click to edit Master subtitle style</a:t>
             </a:r>
+            <a:endParaRPr lang="en-US"/>
           </a:p>
         </p:txBody>
       </p:sp>
@@ -311,7 +297,7 @@
           <a:p>
             <a:fld id="{5BCAD085-E8A6-8845-BD4E-CB4CCA059FC4}" type="datetimeFigureOut">
               <a:rPr lang="en-US" smtClean="0"/>
-              <a:t>3/20/26</a:t>
+              <a:t>1/27/13</a:t>
             </a:fld>
             <a:endParaRPr lang="en-US"/>
           </a:p>
@@ -405,9 +391,10 @@
           <a:lstStyle/>
           <a:p>
             <a:r>
-              <a:rPr lang="en-US"/>
+              <a:rPr lang="en-US" smtClean="0"/>
               <a:t>Click to edit Master title style</a:t>
             </a:r>
+            <a:endParaRPr lang="en-US"/>
           </a:p>
         </p:txBody>
       </p:sp>
@@ -428,37 +415,38 @@
           <a:p>
             <a:pPr lvl="0"/>
             <a:r>
-              <a:rPr lang="en-US"/>
+              <a:rPr lang="en-US" smtClean="0"/>
               <a:t>Click to edit Master text styles</a:t>
             </a:r>
           </a:p>
           <a:p>
             <a:pPr lvl="1"/>
             <a:r>
-              <a:rPr lang="en-US"/>
+              <a:rPr lang="en-US" smtClean="0"/>
               <a:t>Second level</a:t>
             </a:r>
           </a:p>
           <a:p>
             <a:pPr lvl="2"/>
             <a:r>
-              <a:rPr lang="en-US"/>
+              <a:rPr lang="en-US" smtClean="0"/>
               <a:t>Third level</a:t>
             </a:r>
           </a:p>
           <a:p>
             <a:pPr lvl="3"/>
             <a:r>
-              <a:rPr lang="en-US"/>
+              <a:rPr lang="en-US" smtClean="0"/>
               <a:t>Fourth level</a:t>
             </a:r>
           </a:p>
           <a:p>
             <a:pPr lvl="4"/>
             <a:r>
-              <a:rPr lang="en-US"/>
+              <a:rPr lang="en-US" smtClean="0"/>
               <a:t>Fifth level</a:t>
             </a:r>
+            <a:endParaRPr lang="en-US"/>
           </a:p>
         </p:txBody>
       </p:sp>
@@ -479,7 +467,7 @@
           <a:p>
             <a:fld id="{5BCAD085-E8A6-8845-BD4E-CB4CCA059FC4}" type="datetimeFigureOut">
               <a:rPr lang="en-US" smtClean="0"/>
-              <a:t>3/20/26</a:t>
+              <a:t>1/27/13</a:t>
             </a:fld>
             <a:endParaRPr lang="en-US"/>
           </a:p>
@@ -578,9 +566,10 @@
           <a:lstStyle/>
           <a:p>
             <a:r>
-              <a:rPr lang="en-US"/>
+              <a:rPr lang="en-US" smtClean="0"/>
               <a:t>Click to edit Master title style</a:t>
             </a:r>
+            <a:endParaRPr lang="en-US"/>
           </a:p>
         </p:txBody>
       </p:sp>
@@ -606,37 +595,38 @@
           <a:p>
             <a:pPr lvl="0"/>
             <a:r>
-              <a:rPr lang="en-US"/>
+              <a:rPr lang="en-US" smtClean="0"/>
               <a:t>Click to edit Master text styles</a:t>
             </a:r>
           </a:p>
           <a:p>
             <a:pPr lvl="1"/>
             <a:r>
-              <a:rPr lang="en-US"/>
+              <a:rPr lang="en-US" smtClean="0"/>
               <a:t>Second level</a:t>
             </a:r>
           </a:p>
           <a:p>
             <a:pPr lvl="2"/>
             <a:r>
-              <a:rPr lang="en-US"/>
+              <a:rPr lang="en-US" smtClean="0"/>
               <a:t>Third level</a:t>
             </a:r>
           </a:p>
           <a:p>
             <a:pPr lvl="3"/>
             <a:r>
-              <a:rPr lang="en-US"/>
+              <a:rPr lang="en-US" smtClean="0"/>
               <a:t>Fourth level</a:t>
             </a:r>
           </a:p>
           <a:p>
             <a:pPr lvl="4"/>
             <a:r>
-              <a:rPr lang="en-US"/>
+              <a:rPr lang="en-US" smtClean="0"/>
               <a:t>Fifth level</a:t>
             </a:r>
+            <a:endParaRPr lang="en-US"/>
           </a:p>
         </p:txBody>
       </p:sp>
@@ -657,7 +647,7 @@
           <a:p>
             <a:fld id="{5BCAD085-E8A6-8845-BD4E-CB4CCA059FC4}" type="datetimeFigureOut">
               <a:rPr lang="en-US" smtClean="0"/>
-              <a:t>3/20/26</a:t>
+              <a:t>1/27/13</a:t>
             </a:fld>
             <a:endParaRPr lang="en-US"/>
           </a:p>
@@ -751,9 +741,10 @@
           <a:lstStyle/>
           <a:p>
             <a:r>
-              <a:rPr lang="en-US"/>
+              <a:rPr lang="en-US" smtClean="0"/>
               <a:t>Click to edit Master title style</a:t>
             </a:r>
+            <a:endParaRPr lang="en-US"/>
           </a:p>
         </p:txBody>
       </p:sp>
@@ -774,37 +765,38 @@
           <a:p>
             <a:pPr lvl="0"/>
             <a:r>
-              <a:rPr lang="en-US"/>
+              <a:rPr lang="en-US" smtClean="0"/>
               <a:t>Click to edit Master text styles</a:t>
             </a:r>
           </a:p>
           <a:p>
             <a:pPr lvl="1"/>
             <a:r>
-              <a:rPr lang="en-US"/>
+              <a:rPr lang="en-US" smtClean="0"/>
               <a:t>Second level</a:t>
             </a:r>
           </a:p>
           <a:p>
             <a:pPr lvl="2"/>
             <a:r>
-              <a:rPr lang="en-US"/>
+              <a:rPr lang="en-US" smtClean="0"/>
               <a:t>Third level</a:t>
             </a:r>
           </a:p>
           <a:p>
             <a:pPr lvl="3"/>
             <a:r>
-              <a:rPr lang="en-US"/>
+              <a:rPr lang="en-US" smtClean="0"/>
               <a:t>Fourth level</a:t>
             </a:r>
           </a:p>
           <a:p>
             <a:pPr lvl="4"/>
             <a:r>
-              <a:rPr lang="en-US"/>
+              <a:rPr lang="en-US" smtClean="0"/>
               <a:t>Fifth level</a:t>
             </a:r>
+            <a:endParaRPr lang="en-US"/>
           </a:p>
         </p:txBody>
       </p:sp>
@@ -825,7 +817,7 @@
           <a:p>
             <a:fld id="{5BCAD085-E8A6-8845-BD4E-CB4CCA059FC4}" type="datetimeFigureOut">
               <a:rPr lang="en-US" smtClean="0"/>
-              <a:t>3/20/26</a:t>
+              <a:t>1/27/13</a:t>
             </a:fld>
             <a:endParaRPr lang="en-US"/>
           </a:p>
@@ -928,9 +920,10 @@
           </a:lstStyle>
           <a:p>
             <a:r>
-              <a:rPr lang="en-US"/>
+              <a:rPr lang="en-US" smtClean="0"/>
               <a:t>Click to edit Master title style</a:t>
             </a:r>
+            <a:endParaRPr lang="en-US"/>
           </a:p>
         </p:txBody>
       </p:sp>
@@ -1047,7 +1040,7 @@
           <a:p>
             <a:pPr lvl="0"/>
             <a:r>
-              <a:rPr lang="en-US"/>
+              <a:rPr lang="en-US" smtClean="0"/>
               <a:t>Click to edit Master text styles</a:t>
             </a:r>
           </a:p>
@@ -1070,7 +1063,7 @@
           <a:p>
             <a:fld id="{5BCAD085-E8A6-8845-BD4E-CB4CCA059FC4}" type="datetimeFigureOut">
               <a:rPr lang="en-US" smtClean="0"/>
-              <a:t>3/20/26</a:t>
+              <a:t>1/27/13</a:t>
             </a:fld>
             <a:endParaRPr lang="en-US"/>
           </a:p>
@@ -1164,9 +1157,10 @@
           <a:lstStyle/>
           <a:p>
             <a:r>
-              <a:rPr lang="en-US"/>
+              <a:rPr lang="en-US" smtClean="0"/>
               <a:t>Click to edit Master title style</a:t>
             </a:r>
+            <a:endParaRPr lang="en-US"/>
           </a:p>
         </p:txBody>
       </p:sp>
@@ -1220,37 +1214,38 @@
           <a:p>
             <a:pPr lvl="0"/>
             <a:r>
-              <a:rPr lang="en-US"/>
+              <a:rPr lang="en-US" smtClean="0"/>
               <a:t>Click to edit Master text styles</a:t>
             </a:r>
           </a:p>
           <a:p>
             <a:pPr lvl="1"/>
             <a:r>
-              <a:rPr lang="en-US"/>
+              <a:rPr lang="en-US" smtClean="0"/>
               <a:t>Second level</a:t>
             </a:r>
           </a:p>
           <a:p>
             <a:pPr lvl="2"/>
             <a:r>
-              <a:rPr lang="en-US"/>
+              <a:rPr lang="en-US" smtClean="0"/>
               <a:t>Third level</a:t>
             </a:r>
           </a:p>
           <a:p>
             <a:pPr lvl="3"/>
             <a:r>
-              <a:rPr lang="en-US"/>
+              <a:rPr lang="en-US" smtClean="0"/>
               <a:t>Fourth level</a:t>
             </a:r>
           </a:p>
           <a:p>
             <a:pPr lvl="4"/>
             <a:r>
-              <a:rPr lang="en-US"/>
+              <a:rPr lang="en-US" smtClean="0"/>
               <a:t>Fifth level</a:t>
             </a:r>
+            <a:endParaRPr lang="en-US"/>
           </a:p>
         </p:txBody>
       </p:sp>
@@ -1304,37 +1299,38 @@
           <a:p>
             <a:pPr lvl="0"/>
             <a:r>
-              <a:rPr lang="en-US"/>
+              <a:rPr lang="en-US" smtClean="0"/>
               <a:t>Click to edit Master text styles</a:t>
             </a:r>
           </a:p>
           <a:p>
             <a:pPr lvl="1"/>
             <a:r>
-              <a:rPr lang="en-US"/>
+              <a:rPr lang="en-US" smtClean="0"/>
               <a:t>Second level</a:t>
             </a:r>
           </a:p>
           <a:p>
             <a:pPr lvl="2"/>
             <a:r>
-              <a:rPr lang="en-US"/>
+              <a:rPr lang="en-US" smtClean="0"/>
               <a:t>Third level</a:t>
             </a:r>
           </a:p>
           <a:p>
             <a:pPr lvl="3"/>
             <a:r>
-              <a:rPr lang="en-US"/>
+              <a:rPr lang="en-US" smtClean="0"/>
               <a:t>Fourth level</a:t>
             </a:r>
           </a:p>
           <a:p>
             <a:pPr lvl="4"/>
             <a:r>
-              <a:rPr lang="en-US"/>
+              <a:rPr lang="en-US" smtClean="0"/>
               <a:t>Fifth level</a:t>
             </a:r>
+            <a:endParaRPr lang="en-US"/>
           </a:p>
         </p:txBody>
       </p:sp>
@@ -1355,7 +1351,7 @@
           <a:p>
             <a:fld id="{5BCAD085-E8A6-8845-BD4E-CB4CCA059FC4}" type="datetimeFigureOut">
               <a:rPr lang="en-US" smtClean="0"/>
-              <a:t>3/20/26</a:t>
+              <a:t>1/27/13</a:t>
             </a:fld>
             <a:endParaRPr lang="en-US"/>
           </a:p>
@@ -1453,9 +1449,10 @@
           </a:lstStyle>
           <a:p>
             <a:r>
-              <a:rPr lang="en-US"/>
+              <a:rPr lang="en-US" smtClean="0"/>
               <a:t>Click to edit Master title style</a:t>
             </a:r>
+            <a:endParaRPr lang="en-US"/>
           </a:p>
         </p:txBody>
       </p:sp>
@@ -1518,7 +1515,7 @@
           <a:p>
             <a:pPr lvl="0"/>
             <a:r>
-              <a:rPr lang="en-US"/>
+              <a:rPr lang="en-US" smtClean="0"/>
               <a:t>Click to edit Master text styles</a:t>
             </a:r>
           </a:p>
@@ -1574,37 +1571,38 @@
           <a:p>
             <a:pPr lvl="0"/>
             <a:r>
-              <a:rPr lang="en-US"/>
+              <a:rPr lang="en-US" smtClean="0"/>
               <a:t>Click to edit Master text styles</a:t>
             </a:r>
           </a:p>
           <a:p>
             <a:pPr lvl="1"/>
             <a:r>
-              <a:rPr lang="en-US"/>
+              <a:rPr lang="en-US" smtClean="0"/>
               <a:t>Second level</a:t>
             </a:r>
           </a:p>
           <a:p>
             <a:pPr lvl="2"/>
             <a:r>
-              <a:rPr lang="en-US"/>
+              <a:rPr lang="en-US" smtClean="0"/>
               <a:t>Third level</a:t>
             </a:r>
           </a:p>
           <a:p>
             <a:pPr lvl="3"/>
             <a:r>
-              <a:rPr lang="en-US"/>
+              <a:rPr lang="en-US" smtClean="0"/>
               <a:t>Fourth level</a:t>
             </a:r>
           </a:p>
           <a:p>
             <a:pPr lvl="4"/>
             <a:r>
-              <a:rPr lang="en-US"/>
+              <a:rPr lang="en-US" smtClean="0"/>
               <a:t>Fifth level</a:t>
             </a:r>
+            <a:endParaRPr lang="en-US"/>
           </a:p>
         </p:txBody>
       </p:sp>
@@ -1667,7 +1665,7 @@
           <a:p>
             <a:pPr lvl="0"/>
             <a:r>
-              <a:rPr lang="en-US"/>
+              <a:rPr lang="en-US" smtClean="0"/>
               <a:t>Click to edit Master text styles</a:t>
             </a:r>
           </a:p>
@@ -1723,37 +1721,38 @@
           <a:p>
             <a:pPr lvl="0"/>
             <a:r>
-              <a:rPr lang="en-US"/>
+              <a:rPr lang="en-US" smtClean="0"/>
               <a:t>Click to edit Master text styles</a:t>
             </a:r>
           </a:p>
           <a:p>
             <a:pPr lvl="1"/>
             <a:r>
-              <a:rPr lang="en-US"/>
+              <a:rPr lang="en-US" smtClean="0"/>
               <a:t>Second level</a:t>
             </a:r>
           </a:p>
           <a:p>
             <a:pPr lvl="2"/>
             <a:r>
-              <a:rPr lang="en-US"/>
+              <a:rPr lang="en-US" smtClean="0"/>
               <a:t>Third level</a:t>
             </a:r>
           </a:p>
           <a:p>
             <a:pPr lvl="3"/>
             <a:r>
-              <a:rPr lang="en-US"/>
+              <a:rPr lang="en-US" smtClean="0"/>
               <a:t>Fourth level</a:t>
             </a:r>
           </a:p>
           <a:p>
             <a:pPr lvl="4"/>
             <a:r>
-              <a:rPr lang="en-US"/>
+              <a:rPr lang="en-US" smtClean="0"/>
               <a:t>Fifth level</a:t>
             </a:r>
+            <a:endParaRPr lang="en-US"/>
           </a:p>
         </p:txBody>
       </p:sp>
@@ -1774,7 +1773,7 @@
           <a:p>
             <a:fld id="{5BCAD085-E8A6-8845-BD4E-CB4CCA059FC4}" type="datetimeFigureOut">
               <a:rPr lang="en-US" smtClean="0"/>
-              <a:t>3/20/26</a:t>
+              <a:t>1/27/13</a:t>
             </a:fld>
             <a:endParaRPr lang="en-US"/>
           </a:p>
@@ -1868,9 +1867,10 @@
           <a:lstStyle/>
           <a:p>
             <a:r>
-              <a:rPr lang="en-US"/>
+              <a:rPr lang="en-US" smtClean="0"/>
               <a:t>Click to edit Master title style</a:t>
             </a:r>
+            <a:endParaRPr lang="en-US"/>
           </a:p>
         </p:txBody>
       </p:sp>
@@ -1891,7 +1891,7 @@
           <a:p>
             <a:fld id="{5BCAD085-E8A6-8845-BD4E-CB4CCA059FC4}" type="datetimeFigureOut">
               <a:rPr lang="en-US" smtClean="0"/>
-              <a:t>3/20/26</a:t>
+              <a:t>1/27/13</a:t>
             </a:fld>
             <a:endParaRPr lang="en-US"/>
           </a:p>
@@ -1986,7 +1986,7 @@
           <a:p>
             <a:fld id="{5BCAD085-E8A6-8845-BD4E-CB4CCA059FC4}" type="datetimeFigureOut">
               <a:rPr lang="en-US" smtClean="0"/>
-              <a:t>3/20/26</a:t>
+              <a:t>1/27/13</a:t>
             </a:fld>
             <a:endParaRPr lang="en-US"/>
           </a:p>
@@ -2089,9 +2089,10 @@
           </a:lstStyle>
           <a:p>
             <a:r>
-              <a:rPr lang="en-US"/>
+              <a:rPr lang="en-US" smtClean="0"/>
               <a:t>Click to edit Master title style</a:t>
             </a:r>
+            <a:endParaRPr lang="en-US"/>
           </a:p>
         </p:txBody>
       </p:sp>
@@ -2145,37 +2146,38 @@
           <a:p>
             <a:pPr lvl="0"/>
             <a:r>
-              <a:rPr lang="en-US"/>
+              <a:rPr lang="en-US" smtClean="0"/>
               <a:t>Click to edit Master text styles</a:t>
             </a:r>
           </a:p>
           <a:p>
             <a:pPr lvl="1"/>
             <a:r>
-              <a:rPr lang="en-US"/>
+              <a:rPr lang="en-US" smtClean="0"/>
               <a:t>Second level</a:t>
             </a:r>
           </a:p>
           <a:p>
             <a:pPr lvl="2"/>
             <a:r>
-              <a:rPr lang="en-US"/>
+              <a:rPr lang="en-US" smtClean="0"/>
               <a:t>Third level</a:t>
             </a:r>
           </a:p>
           <a:p>
             <a:pPr lvl="3"/>
             <a:r>
-              <a:rPr lang="en-US"/>
+              <a:rPr lang="en-US" smtClean="0"/>
               <a:t>Fourth level</a:t>
             </a:r>
           </a:p>
           <a:p>
             <a:pPr lvl="4"/>
             <a:r>
-              <a:rPr lang="en-US"/>
+              <a:rPr lang="en-US" smtClean="0"/>
               <a:t>Fifth level</a:t>
             </a:r>
+            <a:endParaRPr lang="en-US"/>
           </a:p>
         </p:txBody>
       </p:sp>
@@ -2238,7 +2240,7 @@
           <a:p>
             <a:pPr lvl="0"/>
             <a:r>
-              <a:rPr lang="en-US"/>
+              <a:rPr lang="en-US" smtClean="0"/>
               <a:t>Click to edit Master text styles</a:t>
             </a:r>
           </a:p>
@@ -2261,7 +2263,7 @@
           <a:p>
             <a:fld id="{5BCAD085-E8A6-8845-BD4E-CB4CCA059FC4}" type="datetimeFigureOut">
               <a:rPr lang="en-US" smtClean="0"/>
-              <a:t>3/20/26</a:t>
+              <a:t>1/27/13</a:t>
             </a:fld>
             <a:endParaRPr lang="en-US"/>
           </a:p>
@@ -2364,9 +2366,10 @@
           </a:lstStyle>
           <a:p>
             <a:r>
-              <a:rPr lang="en-US"/>
+              <a:rPr lang="en-US" smtClean="0"/>
               <a:t>Click to edit Master title style</a:t>
             </a:r>
+            <a:endParaRPr lang="en-US"/>
           </a:p>
         </p:txBody>
       </p:sp>
@@ -2490,7 +2493,7 @@
           <a:p>
             <a:pPr lvl="0"/>
             <a:r>
-              <a:rPr lang="en-US"/>
+              <a:rPr lang="en-US" smtClean="0"/>
               <a:t>Click to edit Master text styles</a:t>
             </a:r>
           </a:p>
@@ -2513,7 +2516,7 @@
           <a:p>
             <a:fld id="{5BCAD085-E8A6-8845-BD4E-CB4CCA059FC4}" type="datetimeFigureOut">
               <a:rPr lang="en-US" smtClean="0"/>
-              <a:t>3/20/26</a:t>
+              <a:t>1/27/13</a:t>
             </a:fld>
             <a:endParaRPr lang="en-US"/>
           </a:p>
@@ -2622,9 +2625,10 @@
           <a:lstStyle/>
           <a:p>
             <a:r>
-              <a:rPr lang="en-US"/>
+              <a:rPr lang="en-US" smtClean="0"/>
               <a:t>Click to edit Master title style</a:t>
             </a:r>
+            <a:endParaRPr lang="en-US"/>
           </a:p>
         </p:txBody>
       </p:sp>
@@ -2655,37 +2659,38 @@
           <a:p>
             <a:pPr lvl="0"/>
             <a:r>
-              <a:rPr lang="en-US"/>
+              <a:rPr lang="en-US" smtClean="0"/>
               <a:t>Click to edit Master text styles</a:t>
             </a:r>
           </a:p>
           <a:p>
             <a:pPr lvl="1"/>
             <a:r>
-              <a:rPr lang="en-US"/>
+              <a:rPr lang="en-US" smtClean="0"/>
               <a:t>Second level</a:t>
             </a:r>
           </a:p>
           <a:p>
             <a:pPr lvl="2"/>
             <a:r>
-              <a:rPr lang="en-US"/>
+              <a:rPr lang="en-US" smtClean="0"/>
               <a:t>Third level</a:t>
             </a:r>
           </a:p>
           <a:p>
             <a:pPr lvl="3"/>
             <a:r>
-              <a:rPr lang="en-US"/>
+              <a:rPr lang="en-US" smtClean="0"/>
               <a:t>Fourth level</a:t>
             </a:r>
           </a:p>
           <a:p>
             <a:pPr lvl="4"/>
             <a:r>
-              <a:rPr lang="en-US"/>
+              <a:rPr lang="en-US" smtClean="0"/>
               <a:t>Fifth level</a:t>
             </a:r>
+            <a:endParaRPr lang="en-US"/>
           </a:p>
         </p:txBody>
       </p:sp>
@@ -2724,7 +2729,7 @@
           <a:p>
             <a:fld id="{5BCAD085-E8A6-8845-BD4E-CB4CCA059FC4}" type="datetimeFigureOut">
               <a:rPr lang="en-US" smtClean="0"/>
-              <a:t>3/20/26</a:t>
+              <a:t>1/27/13</a:t>
             </a:fld>
             <a:endParaRPr lang="en-US"/>
           </a:p>
@@ -3083,7 +3088,7 @@
 </file>
 
 <file path=ppt/slides/slide1.xml><?xml version="1.0" encoding="utf-8"?>
-<p:sld xmlns:a="http://schemas.openxmlformats.org/drawingml/2006/main" xmlns:r="http://schemas.openxmlformats.org/officeDocument/2006/relationships" xmlns:p="http://schemas.openxmlformats.org/presentationml/2006/main">
+<p:sld xmlns:a="http://schemas.openxmlformats.org/drawingml/2006/main" xmlns:p="http://schemas.openxmlformats.org/presentationml/2006/main" xmlns:r="http://schemas.openxmlformats.org/officeDocument/2006/relationships">
   <p:cSld>
     <p:spTree>
       <p:nvGrpSpPr>
@@ -3091,14 +3096,7 @@
         <p:cNvGrpSpPr/>
         <p:nvPr/>
       </p:nvGrpSpPr>
-      <p:grpSpPr>
-        <a:xfrm>
-          <a:off x="0" y="0"/>
-          <a:ext cx="0" cy="0"/>
-          <a:chOff x="0" y="0"/>
-          <a:chExt cx="0" cy="0"/>
-        </a:xfrm>
-      </p:grpSpPr>
+      <p:grpSpPr/>
       <p:sp>
         <p:nvSpPr>
           <p:cNvPr id="2" name="Rectangle 1"/>
@@ -3139,7 +3137,6 @@
           <a:lstStyle/>
           <a:p>
             <a:pPr algn="ctr"/>
-            <a:endParaRPr/>
           </a:p>
         </p:txBody>
       </p:sp>
@@ -3424,7 +3421,7 @@
 </file>
 
 <file path=ppt/slides/slide10.xml><?xml version="1.0" encoding="utf-8"?>
-<p:sld xmlns:a="http://schemas.openxmlformats.org/drawingml/2006/main" xmlns:r="http://schemas.openxmlformats.org/officeDocument/2006/relationships" xmlns:p="http://schemas.openxmlformats.org/presentationml/2006/main">
+<p:sld xmlns:a="http://schemas.openxmlformats.org/drawingml/2006/main" xmlns:p="http://schemas.openxmlformats.org/presentationml/2006/main" xmlns:r="http://schemas.openxmlformats.org/officeDocument/2006/relationships">
   <p:cSld>
     <p:spTree>
       <p:nvGrpSpPr>
@@ -3432,14 +3429,7 @@
         <p:cNvGrpSpPr/>
         <p:nvPr/>
       </p:nvGrpSpPr>
-      <p:grpSpPr>
-        <a:xfrm>
-          <a:off x="0" y="0"/>
-          <a:ext cx="0" cy="0"/>
-          <a:chOff x="0" y="0"/>
-          <a:chExt cx="0" cy="0"/>
-        </a:xfrm>
-      </p:grpSpPr>
+      <p:grpSpPr/>
       <p:sp>
         <p:nvSpPr>
           <p:cNvPr id="2" name="Rectangle 1"/>
@@ -3480,7 +3470,6 @@
           <a:lstStyle/>
           <a:p>
             <a:pPr algn="ctr"/>
-            <a:endParaRPr/>
           </a:p>
         </p:txBody>
       </p:sp>
@@ -3617,7 +3606,6 @@
                 <a:latin typeface="Calibri"/>
               </a:defRPr>
             </a:pPr>
-            <a:endParaRPr/>
           </a:p>
           <a:p>
             <a:pPr>
@@ -3695,7 +3683,6 @@
                 <a:latin typeface="Calibri"/>
               </a:defRPr>
             </a:pPr>
-            <a:endParaRPr/>
           </a:p>
           <a:p>
             <a:pPr>
@@ -3724,7 +3711,7 @@
 </file>
 
 <file path=ppt/slides/slide2.xml><?xml version="1.0" encoding="utf-8"?>
-<p:sld xmlns:a="http://schemas.openxmlformats.org/drawingml/2006/main" xmlns:r="http://schemas.openxmlformats.org/officeDocument/2006/relationships" xmlns:p="http://schemas.openxmlformats.org/presentationml/2006/main">
+<p:sld xmlns:a="http://schemas.openxmlformats.org/drawingml/2006/main" xmlns:p="http://schemas.openxmlformats.org/presentationml/2006/main" xmlns:r="http://schemas.openxmlformats.org/officeDocument/2006/relationships">
   <p:cSld>
     <p:spTree>
       <p:nvGrpSpPr>
@@ -3732,14 +3719,7 @@
         <p:cNvGrpSpPr/>
         <p:nvPr/>
       </p:nvGrpSpPr>
-      <p:grpSpPr>
-        <a:xfrm>
-          <a:off x="0" y="0"/>
-          <a:ext cx="0" cy="0"/>
-          <a:chOff x="0" y="0"/>
-          <a:chExt cx="0" cy="0"/>
-        </a:xfrm>
-      </p:grpSpPr>
+      <p:grpSpPr/>
       <p:sp>
         <p:nvSpPr>
           <p:cNvPr id="2" name="Rectangle 1"/>
@@ -3780,7 +3760,6 @@
           <a:lstStyle/>
           <a:p>
             <a:pPr algn="ctr"/>
-            <a:endParaRPr/>
           </a:p>
         </p:txBody>
       </p:sp>
@@ -3869,7 +3848,6 @@
                 <a:latin typeface="Calibri"/>
               </a:defRPr>
             </a:pPr>
-            <a:endParaRPr/>
           </a:p>
           <a:p>
             <a:pPr>
@@ -3915,7 +3893,6 @@
                 <a:latin typeface="Calibri"/>
               </a:defRPr>
             </a:pPr>
-            <a:endParaRPr/>
           </a:p>
           <a:p>
             <a:pPr>
@@ -3945,7 +3922,6 @@
                 <a:latin typeface="Calibri"/>
               </a:defRPr>
             </a:pPr>
-            <a:endParaRPr/>
           </a:p>
           <a:p>
             <a:pPr>
@@ -3975,7 +3951,6 @@
                 <a:latin typeface="Calibri"/>
               </a:defRPr>
             </a:pPr>
-            <a:endParaRPr/>
           </a:p>
         </p:txBody>
       </p:sp>
@@ -3988,7 +3963,7 @@
 </file>
 
 <file path=ppt/slides/slide3.xml><?xml version="1.0" encoding="utf-8"?>
-<p:sld xmlns:a="http://schemas.openxmlformats.org/drawingml/2006/main" xmlns:r="http://schemas.openxmlformats.org/officeDocument/2006/relationships" xmlns:p="http://schemas.openxmlformats.org/presentationml/2006/main">
+<p:sld xmlns:a="http://schemas.openxmlformats.org/drawingml/2006/main" xmlns:p="http://schemas.openxmlformats.org/presentationml/2006/main" xmlns:r="http://schemas.openxmlformats.org/officeDocument/2006/relationships">
   <p:cSld>
     <p:spTree>
       <p:nvGrpSpPr>
@@ -3996,14 +3971,7 @@
         <p:cNvGrpSpPr/>
         <p:nvPr/>
       </p:nvGrpSpPr>
-      <p:grpSpPr>
-        <a:xfrm>
-          <a:off x="0" y="0"/>
-          <a:ext cx="0" cy="0"/>
-          <a:chOff x="0" y="0"/>
-          <a:chExt cx="0" cy="0"/>
-        </a:xfrm>
-      </p:grpSpPr>
+      <p:grpSpPr/>
       <p:sp>
         <p:nvSpPr>
           <p:cNvPr id="2" name="Rectangle 1"/>
@@ -4044,7 +4012,6 @@
           <a:lstStyle/>
           <a:p>
             <a:pPr algn="ctr"/>
-            <a:endParaRPr/>
           </a:p>
         </p:txBody>
       </p:sp>
@@ -4122,14 +4089,59 @@
       </p:sp>
       <p:sp>
         <p:nvSpPr>
-          <p:cNvPr id="7" name="TextBox 6"/>
+          <p:cNvPr id="5" name="Rounded Rectangle 4"/>
+          <p:cNvSpPr/>
+          <p:nvPr/>
+        </p:nvSpPr>
+        <p:spPr>
+          <a:xfrm>
+            <a:off x="548640" y="1645920"/>
+            <a:ext cx="5669280" cy="1417320"/>
+          </a:xfrm>
+          <a:prstGeom prst="roundRect">
+            <a:avLst/>
+          </a:prstGeom>
+          <a:solidFill>
+            <a:srgbClr val="F0F0F0"/>
+          </a:solidFill>
+          <a:ln w="12700">
+            <a:solidFill>
+              <a:srgbClr val="999999"/>
+            </a:solidFill>
+          </a:ln>
+        </p:spPr>
+        <p:style>
+          <a:lnRef idx="1">
+            <a:schemeClr val="accent1"/>
+          </a:lnRef>
+          <a:fillRef idx="3">
+            <a:schemeClr val="accent1"/>
+          </a:fillRef>
+          <a:effectRef idx="2">
+            <a:schemeClr val="accent1"/>
+          </a:effectRef>
+          <a:fontRef idx="minor">
+            <a:schemeClr val="lt1"/>
+          </a:fontRef>
+        </p:style>
+        <p:txBody>
+          <a:bodyPr rtlCol="0" anchor="ctr"/>
+          <a:lstStyle/>
+          <a:p>
+            <a:pPr algn="ctr"/>
+          </a:p>
+        </p:txBody>
+      </p:sp>
+      <p:sp>
+        <p:nvSpPr>
+          <p:cNvPr id="6" name="TextBox 5"/>
           <p:cNvSpPr txBox="1"/>
           <p:nvPr/>
         </p:nvSpPr>
         <p:spPr>
           <a:xfrm>
-            <a:off x="6731000" y="1968500"/>
-            <a:ext cx="4953000" cy="4572000"/>
+            <a:off x="731520" y="1737360"/>
+            <a:ext cx="5303520" cy="1234440"/>
           </a:xfrm>
           <a:prstGeom prst="rect">
             <a:avLst/>
@@ -4143,530 +4155,187 @@
           <a:lstStyle/>
           <a:p>
             <a:pPr>
-              <a:defRPr sz="1800" b="1">
-                <a:solidFill>
-                  <a:srgbClr val="1B3A5C"/>
-                </a:solidFill>
-                <a:latin typeface="Calibri"/>
-              </a:defRPr>
-            </a:pPr>
-            <a:r>
-              <a:t>If we call track_until_cross() again:</a:t>
-            </a:r>
-          </a:p>
-          <a:p>
-            <a:pPr>
-              <a:spcAft>
-                <a:spcPts val="400"/>
-              </a:spcAft>
-              <a:defRPr sz="1600" b="0">
-                <a:solidFill>
-                  <a:srgbClr val="000000"/>
-                </a:solidFill>
-                <a:latin typeface="Calibri"/>
-              </a:defRPr>
-            </a:pPr>
-            <a:r>
-              <a:t>Both sensors are already above threshold</a:t>
-            </a:r>
-          </a:p>
-          <a:p>
-            <a:pPr>
-              <a:spcAft>
-                <a:spcPts val="400"/>
-              </a:spcAft>
-              <a:defRPr sz="1600" b="0">
-                <a:solidFill>
-                  <a:srgbClr val="000000"/>
-                </a:solidFill>
-                <a:latin typeface="Calibri"/>
-              </a:defRPr>
-            </a:pPr>
-            <a:r>
-              <a:t>is_at_cross() returns True immediately</a:t>
-            </a:r>
-          </a:p>
-          <a:p>
-            <a:pPr>
-              <a:spcAft>
-                <a:spcPts val="400"/>
-              </a:spcAft>
-              <a:defRPr sz="1600" b="0">
-                <a:solidFill>
-                  <a:srgbClr val="000000"/>
-                </a:solidFill>
-                <a:latin typeface="Calibri"/>
-              </a:defRPr>
-            </a:pPr>
-            <a:r>
-              <a:t>The robot "detects" the intersection it's already on!</a:t>
-            </a:r>
-          </a:p>
-          <a:p>
-            <a:pPr>
-              <a:spcAft>
-                <a:spcPts val="400"/>
-              </a:spcAft>
-              <a:defRPr sz="1800" b="1">
-                <a:solidFill>
-                  <a:srgbClr val="1B3A5C"/>
-                </a:solidFill>
-                <a:latin typeface="Calibri"/>
-              </a:defRPr>
-            </a:pPr>
-            <a:r>
-              <a:t>Solution: Drive forward briefly to move PAST the cross.</a:t>
-            </a:r>
-          </a:p>
-        </p:txBody>
-      </p:sp>
-      <p:sp>
-        <p:nvSpPr>
-          <p:cNvPr id="100" name="Road H"/>
-          <p:cNvSpPr/>
+              <a:spcAft>
+                <a:spcPts val="100"/>
+              </a:spcAft>
+              <a:defRPr sz="1800">
+                <a:solidFill>
+                  <a:srgbClr val="333333"/>
+                </a:solidFill>
+                <a:latin typeface="Courier New"/>
+              </a:defRPr>
+            </a:pPr>
+            <a:r>
+              <a:t>Line ──────+────── Line</a:t>
+            </a:r>
+          </a:p>
+          <a:p>
+            <a:pPr>
+              <a:spcAft>
+                <a:spcPts val="100"/>
+              </a:spcAft>
+              <a:defRPr sz="1800">
+                <a:solidFill>
+                  <a:srgbClr val="333333"/>
+                </a:solidFill>
+                <a:latin typeface="Courier New"/>
+              </a:defRPr>
+            </a:pPr>
+            <a:r>
+              <a:t>             |</a:t>
+            </a:r>
+          </a:p>
+          <a:p>
+            <a:pPr>
+              <a:spcAft>
+                <a:spcPts val="100"/>
+              </a:spcAft>
+              <a:defRPr sz="1800">
+                <a:solidFill>
+                  <a:srgbClr val="333333"/>
+                </a:solidFill>
+                <a:latin typeface="Courier New"/>
+              </a:defRPr>
+            </a:pPr>
+            <a:r>
+              <a:t>         [ROBOT]  ← Sensors right on the cross!</a:t>
+            </a:r>
+          </a:p>
+          <a:p>
+            <a:pPr>
+              <a:spcAft>
+                <a:spcPts val="100"/>
+              </a:spcAft>
+              <a:defRPr sz="1800">
+                <a:solidFill>
+                  <a:srgbClr val="333333"/>
+                </a:solidFill>
+                <a:latin typeface="Courier New"/>
+              </a:defRPr>
+            </a:pPr>
+            <a:r>
+              <a:t>             |</a:t>
+            </a:r>
+          </a:p>
+          <a:p>
+            <a:pPr>
+              <a:spcAft>
+                <a:spcPts val="100"/>
+              </a:spcAft>
+              <a:defRPr sz="1800">
+                <a:solidFill>
+                  <a:srgbClr val="333333"/>
+                </a:solidFill>
+                <a:latin typeface="Courier New"/>
+              </a:defRPr>
+            </a:pPr>
+            <a:r>
+              <a:t>             Line</a:t>
+            </a:r>
+          </a:p>
+        </p:txBody>
+      </p:sp>
+      <p:sp>
+        <p:nvSpPr>
+          <p:cNvPr id="7" name="TextBox 6"/>
+          <p:cNvSpPr txBox="1"/>
           <p:nvPr/>
         </p:nvSpPr>
         <p:spPr>
           <a:xfrm>
-            <a:off x="1524000" y="3937000"/>
-            <a:ext cx="3810000" cy="762000"/>
-          </a:xfrm>
-          <a:prstGeom prst="rect">
-            <a:avLst/>
-          </a:prstGeom>
-          <a:solidFill>
-            <a:srgbClr val="D9D9D9"/>
-          </a:solidFill>
-          <a:ln w="0">
-            <a:noFill/>
-          </a:ln>
-        </p:spPr>
-        <p:txBody>
-          <a:bodyPr/>
-          <a:lstStyle/>
-          <a:p>
-            <a:endParaRPr/>
-          </a:p>
-        </p:txBody>
-      </p:sp>
-      <p:sp>
-        <p:nvSpPr>
-          <p:cNvPr id="101" name="Road V"/>
-          <p:cNvSpPr/>
-          <p:nvPr/>
-        </p:nvSpPr>
-        <p:spPr>
-          <a:xfrm>
-            <a:off x="3048000" y="2413000"/>
-            <a:ext cx="762000" cy="3810000"/>
-          </a:xfrm>
-          <a:prstGeom prst="rect">
-            <a:avLst/>
-          </a:prstGeom>
-          <a:solidFill>
-            <a:srgbClr val="D9D9D9"/>
-          </a:solidFill>
-          <a:ln w="0">
-            <a:noFill/>
-          </a:ln>
-        </p:spPr>
-        <p:txBody>
-          <a:bodyPr/>
-          <a:lstStyle/>
-          <a:p>
-            <a:endParaRPr/>
-          </a:p>
-        </p:txBody>
-      </p:sp>
-      <p:cxnSp>
-        <p:nvCxnSpPr>
-          <p:cNvPr id="102" name="Line Left"/>
-          <p:cNvCxnSpPr/>
-          <p:nvPr/>
-        </p:nvCxnSpPr>
-        <p:spPr>
-          <a:xfrm>
-            <a:off x="1587500" y="4318000"/>
-            <a:ext cx="1460500" cy="0"/>
-          </a:xfrm>
-          <a:prstGeom prst="line">
-            <a:avLst/>
-          </a:prstGeom>
-          <a:ln w="76200" cap="rnd">
-            <a:solidFill>
-              <a:srgbClr val="1B3A5C"/>
-            </a:solidFill>
-            <a:round/>
-          </a:ln>
-        </p:spPr>
-      </p:cxnSp>
-      <p:cxnSp>
-        <p:nvCxnSpPr>
-          <p:cNvPr id="103" name="Line Right"/>
-          <p:cNvCxnSpPr/>
-          <p:nvPr/>
-        </p:nvCxnSpPr>
-        <p:spPr>
-          <a:xfrm>
-            <a:off x="3619500" y="4318000"/>
-            <a:ext cx="1460500" cy="0"/>
-          </a:xfrm>
-          <a:prstGeom prst="line">
-            <a:avLst/>
-          </a:prstGeom>
-          <a:ln w="76200" cap="rnd">
-            <a:solidFill>
-              <a:srgbClr val="1B3A5C"/>
-            </a:solidFill>
-            <a:round/>
-          </a:ln>
-        </p:spPr>
-      </p:cxnSp>
-      <p:cxnSp>
-        <p:nvCxnSpPr>
-          <p:cNvPr id="104" name="Line Top"/>
-          <p:cNvCxnSpPr/>
-          <p:nvPr/>
-        </p:nvCxnSpPr>
-        <p:spPr>
-          <a:xfrm>
-            <a:off x="3429000" y="2476500"/>
-            <a:ext cx="0" cy="1460500"/>
-          </a:xfrm>
-          <a:prstGeom prst="line">
-            <a:avLst/>
-          </a:prstGeom>
-          <a:ln w="76200" cap="rnd">
-            <a:solidFill>
-              <a:srgbClr val="1B3A5C"/>
-            </a:solidFill>
-            <a:round/>
-          </a:ln>
-        </p:spPr>
-      </p:cxnSp>
-      <p:cxnSp>
-        <p:nvCxnSpPr>
-          <p:cNvPr id="105" name="Line Bottom"/>
-          <p:cNvCxnSpPr/>
-          <p:nvPr/>
-        </p:nvCxnSpPr>
-        <p:spPr>
-          <a:xfrm>
-            <a:off x="3429000" y="4508500"/>
-            <a:ext cx="0" cy="1460500"/>
-          </a:xfrm>
-          <a:prstGeom prst="line">
-            <a:avLst/>
-          </a:prstGeom>
-          <a:ln w="76200" cap="rnd">
-            <a:solidFill>
-              <a:srgbClr val="1B3A5C"/>
-            </a:solidFill>
-            <a:round/>
-          </a:ln>
-        </p:spPr>
-      </p:cxnSp>
-      <p:sp>
-        <p:nvSpPr>
-          <p:cNvPr id="106" name="Label"/>
-          <p:cNvSpPr/>
-          <p:nvPr/>
-        </p:nvSpPr>
-        <p:spPr>
-          <a:xfrm>
-            <a:off x="863600" y="4140200"/>
-            <a:ext cx="508000" cy="355600"/>
+            <a:off x="6583680" y="1645920"/>
+            <a:ext cx="5029200" cy="1417320"/>
           </a:xfrm>
           <a:prstGeom prst="rect">
             <a:avLst/>
           </a:prstGeom>
           <a:noFill/>
-          <a:ln w="0">
-            <a:noFill/>
-          </a:ln>
         </p:spPr>
         <p:txBody>
-          <a:bodyPr wrap="none" lIns="0" tIns="0" rIns="0" bIns="0" anchor="ctr"/>
-          <a:lstStyle/>
-          <a:p>
-            <a:pPr algn="ctr"/>
-            <a:r>
-              <a:rPr lang="en-US" sz="1400" b="1" dirty="0">
+          <a:bodyPr wrap="square">
+            <a:spAutoFit/>
+          </a:bodyPr>
+          <a:lstStyle/>
+          <a:p>
+            <a:pPr>
+              <a:defRPr sz="1800" b="1">
                 <a:solidFill>
                   <a:srgbClr val="1B3A5C"/>
                 </a:solidFill>
                 <a:latin typeface="Calibri"/>
-              </a:rPr>
-              <a:t>Line</a:t>
-            </a:r>
-          </a:p>
-        </p:txBody>
-      </p:sp>
-      <p:sp>
-        <p:nvSpPr>
-          <p:cNvPr id="107" name="Label"/>
-          <p:cNvSpPr/>
-          <p:nvPr/>
-        </p:nvSpPr>
-        <p:spPr>
-          <a:xfrm>
-            <a:off x="5334000" y="4140200"/>
-            <a:ext cx="508000" cy="355600"/>
-          </a:xfrm>
-          <a:prstGeom prst="rect">
-            <a:avLst/>
-          </a:prstGeom>
-          <a:noFill/>
-          <a:ln w="0">
-            <a:noFill/>
-          </a:ln>
-        </p:spPr>
-        <p:txBody>
-          <a:bodyPr wrap="none" lIns="0" tIns="0" rIns="0" bIns="0" anchor="ctr"/>
-          <a:lstStyle/>
-          <a:p>
-            <a:pPr algn="ctr"/>
-            <a:r>
-              <a:rPr lang="en-US" sz="1400" b="1" dirty="0">
+              </a:defRPr>
+            </a:pPr>
+            <a:r>
+              <a:t>If we call track_until_cross() again:</a:t>
+            </a:r>
+          </a:p>
+          <a:p>
+            <a:pPr>
+              <a:spcAft>
+                <a:spcPts val="400"/>
+              </a:spcAft>
+              <a:defRPr sz="1600" b="0">
+                <a:solidFill>
+                  <a:srgbClr val="000000"/>
+                </a:solidFill>
+                <a:latin typeface="Calibri"/>
+              </a:defRPr>
+            </a:pPr>
+            <a:r>
+              <a:t>Both sensors are already above threshold</a:t>
+            </a:r>
+          </a:p>
+          <a:p>
+            <a:pPr>
+              <a:spcAft>
+                <a:spcPts val="400"/>
+              </a:spcAft>
+              <a:defRPr sz="1600" b="0">
+                <a:solidFill>
+                  <a:srgbClr val="000000"/>
+                </a:solidFill>
+                <a:latin typeface="Calibri"/>
+              </a:defRPr>
+            </a:pPr>
+            <a:r>
+              <a:t>is_at_cross() returns True immediately</a:t>
+            </a:r>
+          </a:p>
+          <a:p>
+            <a:pPr>
+              <a:spcAft>
+                <a:spcPts val="400"/>
+              </a:spcAft>
+              <a:defRPr sz="1600" b="0">
+                <a:solidFill>
+                  <a:srgbClr val="000000"/>
+                </a:solidFill>
+                <a:latin typeface="Calibri"/>
+              </a:defRPr>
+            </a:pPr>
+            <a:r>
+              <a:t>The robot "detects" the intersection it's already on!</a:t>
+            </a:r>
+          </a:p>
+          <a:p>
+            <a:pPr>
+              <a:spcAft>
+                <a:spcPts val="400"/>
+              </a:spcAft>
+              <a:defRPr sz="1800" b="1">
                 <a:solidFill>
                   <a:srgbClr val="1B3A5C"/>
                 </a:solidFill>
                 <a:latin typeface="Calibri"/>
-              </a:rPr>
-              <a:t>Line</a:t>
-            </a:r>
-          </a:p>
-        </p:txBody>
-      </p:sp>
-      <p:sp>
-        <p:nvSpPr>
-          <p:cNvPr id="108" name="Label"/>
-          <p:cNvSpPr/>
-          <p:nvPr/>
-        </p:nvSpPr>
-        <p:spPr>
-          <a:xfrm>
-            <a:off x="3175000" y="2006600"/>
-            <a:ext cx="508000" cy="355600"/>
-          </a:xfrm>
-          <a:prstGeom prst="rect">
-            <a:avLst/>
-          </a:prstGeom>
-          <a:noFill/>
-          <a:ln w="0">
-            <a:noFill/>
-          </a:ln>
-        </p:spPr>
-        <p:txBody>
-          <a:bodyPr wrap="none" lIns="0" tIns="0" rIns="0" bIns="0" anchor="ctr"/>
-          <a:lstStyle/>
-          <a:p>
-            <a:pPr algn="ctr"/>
-            <a:r>
-              <a:rPr lang="en-US" sz="1400" b="1" dirty="0">
-                <a:solidFill>
-                  <a:srgbClr val="1B3A5C"/>
-                </a:solidFill>
-                <a:latin typeface="Calibri"/>
-              </a:rPr>
-              <a:t>Line</a:t>
-            </a:r>
-          </a:p>
-        </p:txBody>
-      </p:sp>
-      <p:sp>
-        <p:nvSpPr>
-          <p:cNvPr id="109" name="Label"/>
-          <p:cNvSpPr/>
-          <p:nvPr/>
-        </p:nvSpPr>
-        <p:spPr>
-          <a:xfrm>
-            <a:off x="3175000" y="6248400"/>
-            <a:ext cx="508000" cy="355600"/>
-          </a:xfrm>
-          <a:prstGeom prst="rect">
-            <a:avLst/>
-          </a:prstGeom>
-          <a:noFill/>
-          <a:ln w="0">
-            <a:noFill/>
-          </a:ln>
-        </p:spPr>
-        <p:txBody>
-          <a:bodyPr wrap="none" lIns="0" tIns="0" rIns="0" bIns="0" anchor="ctr"/>
-          <a:lstStyle/>
-          <a:p>
-            <a:pPr algn="ctr"/>
-            <a:r>
-              <a:rPr lang="en-US" sz="1400" b="1" dirty="0">
-                <a:solidFill>
-                  <a:srgbClr val="1B3A5C"/>
-                </a:solidFill>
-                <a:latin typeface="Calibri"/>
-              </a:rPr>
-              <a:t>Line</a:t>
-            </a:r>
-          </a:p>
-        </p:txBody>
-      </p:sp>
-      <p:sp>
-        <p:nvSpPr>
-          <p:cNvPr id="110" name="Robot"/>
-          <p:cNvSpPr/>
-          <p:nvPr/>
-        </p:nvSpPr>
-        <p:spPr>
-          <a:xfrm>
-            <a:off x="2908300" y="4445000"/>
-            <a:ext cx="1041400" cy="533400"/>
-          </a:xfrm>
-          <a:prstGeom prst="roundRect">
-            <a:avLst>
-              <a:gd name="adj" fmla="val 16667"/>
-            </a:avLst>
-          </a:prstGeom>
-          <a:solidFill>
-            <a:srgbClr val="E74C3C"/>
-          </a:solidFill>
-          <a:ln w="19050">
-            <a:solidFill>
-              <a:srgbClr val="C0392B"/>
-            </a:solidFill>
-          </a:ln>
-          <a:effectLst>
-            <a:outerShdw blurRad="50800" dist="25400" dir="5400000" algn="t" rotWithShape="0">
-              <a:srgbClr val="000000">
-                <a:alpha val="30000"/>
-              </a:srgbClr>
-            </a:outerShdw>
-          </a:effectLst>
-        </p:spPr>
-        <p:txBody>
-          <a:bodyPr wrap="none" lIns="0" tIns="0" rIns="0" bIns="0" anchor="ctr"/>
-          <a:lstStyle/>
-          <a:p>
-            <a:pPr algn="ctr"/>
-            <a:r>
-              <a:rPr lang="en-US" sz="1400" b="1" dirty="0">
-                <a:solidFill>
-                  <a:srgbClr val="FFFFFF"/>
-                </a:solidFill>
-                <a:latin typeface="Calibri"/>
-              </a:rPr>
-              <a:t>ROBOT</a:t>
-            </a:r>
-          </a:p>
-        </p:txBody>
-      </p:sp>
-      <p:sp>
-        <p:nvSpPr>
-          <p:cNvPr id="111" name="Sensor L"/>
-          <p:cNvSpPr/>
-          <p:nvPr/>
-        </p:nvSpPr>
-        <p:spPr>
-          <a:xfrm>
-            <a:off x="3162300" y="4216400"/>
-            <a:ext cx="203200" cy="203200"/>
-          </a:xfrm>
-          <a:prstGeom prst="ellipse">
-            <a:avLst/>
-          </a:prstGeom>
-          <a:solidFill>
-            <a:srgbClr val="F1C40F"/>
-          </a:solidFill>
-          <a:ln w="0">
-            <a:noFill/>
-          </a:ln>
-        </p:spPr>
-        <p:txBody>
-          <a:bodyPr/>
-          <a:lstStyle/>
-          <a:p>
-            <a:endParaRPr/>
-          </a:p>
-        </p:txBody>
-      </p:sp>
-      <p:sp>
-        <p:nvSpPr>
-          <p:cNvPr id="112" name="Sensor R"/>
-          <p:cNvSpPr/>
-          <p:nvPr/>
-        </p:nvSpPr>
-        <p:spPr>
-          <a:xfrm>
-            <a:off x="3492500" y="4216400"/>
-            <a:ext cx="203200" cy="203200"/>
-          </a:xfrm>
-          <a:prstGeom prst="ellipse">
-            <a:avLst/>
-          </a:prstGeom>
-          <a:solidFill>
-            <a:srgbClr val="F1C40F"/>
-          </a:solidFill>
-          <a:ln w="0">
-            <a:noFill/>
-          </a:ln>
-        </p:spPr>
-        <p:txBody>
-          <a:bodyPr/>
-          <a:lstStyle/>
-          <a:p>
-            <a:endParaRPr/>
-          </a:p>
-        </p:txBody>
-      </p:sp>
-      <p:sp>
-        <p:nvSpPr>
-          <p:cNvPr id="113" name="Callout"/>
-          <p:cNvSpPr/>
-          <p:nvPr/>
-        </p:nvSpPr>
-        <p:spPr>
-          <a:xfrm>
-            <a:off x="4064000" y="3048000"/>
-            <a:ext cx="2476500" cy="406400"/>
-          </a:xfrm>
-          <a:prstGeom prst="wedgeRoundRectCallout">
-            <a:avLst>
-              <a:gd name="adj1" fmla="val -65000"/>
-              <a:gd name="adj2" fmla="val 60000"/>
-              <a:gd name="adj3" fmla="val 16667"/>
-            </a:avLst>
-          </a:prstGeom>
-          <a:solidFill>
-            <a:srgbClr val="FFF3CD"/>
-          </a:solidFill>
-          <a:ln w="12700">
-            <a:solidFill>
-              <a:srgbClr val="E8A317"/>
-            </a:solidFill>
-          </a:ln>
-        </p:spPr>
-        <p:txBody>
-          <a:bodyPr wrap="square" lIns="36000" tIns="18000" rIns="36000" bIns="18000" anchor="ctr"/>
-          <a:lstStyle/>
-          <a:p>
-            <a:pPr algn="ctr"/>
-            <a:r>
-              <a:rPr lang="en-US" sz="1400" b="1" dirty="0">
-                <a:solidFill>
-                  <a:srgbClr val="E74C3C"/>
-                </a:solidFill>
-                <a:latin typeface="Calibri"/>
-              </a:rPr>
-              <a:t>Sensors right on the cross!</a:t>
+              </a:defRPr>
+            </a:pPr>
+            <a:r>
+              <a:t>Solution: Drive forward briefly to move PAST the cross.</a:t>
             </a:r>
           </a:p>
         </p:txBody>
       </p:sp>
     </p:spTree>
-    <p:extLst>
-      <p:ext uri="{BB962C8B-B14F-4D97-AF65-F5344CB8AC3E}">
-        <p14:creationId xmlns:p14="http://schemas.microsoft.com/office/powerpoint/2010/main" val="957151189"/>
-      </p:ext>
-    </p:extLst>
   </p:cSld>
   <p:clrMapOvr>
     <a:masterClrMapping/>
@@ -4675,7 +4344,7 @@
 </file>
 
 <file path=ppt/slides/slide4.xml><?xml version="1.0" encoding="utf-8"?>
-<p:sld xmlns:a="http://schemas.openxmlformats.org/drawingml/2006/main" xmlns:r="http://schemas.openxmlformats.org/officeDocument/2006/relationships" xmlns:p="http://schemas.openxmlformats.org/presentationml/2006/main">
+<p:sld xmlns:a="http://schemas.openxmlformats.org/drawingml/2006/main" xmlns:p="http://schemas.openxmlformats.org/presentationml/2006/main" xmlns:r="http://schemas.openxmlformats.org/officeDocument/2006/relationships">
   <p:cSld>
     <p:spTree>
       <p:nvGrpSpPr>
@@ -4683,14 +4352,7 @@
         <p:cNvGrpSpPr/>
         <p:nvPr/>
       </p:nvGrpSpPr>
-      <p:grpSpPr>
-        <a:xfrm>
-          <a:off x="0" y="0"/>
-          <a:ext cx="0" cy="0"/>
-          <a:chOff x="0" y="0"/>
-          <a:chExt cx="0" cy="0"/>
-        </a:xfrm>
-      </p:grpSpPr>
+      <p:grpSpPr/>
       <p:sp>
         <p:nvSpPr>
           <p:cNvPr id="2" name="Rectangle 1"/>
@@ -4731,7 +4393,6 @@
           <a:lstStyle/>
           <a:p>
             <a:pPr algn="ctr"/>
-            <a:endParaRPr/>
           </a:p>
         </p:txBody>
       </p:sp>
@@ -4815,8 +4476,8 @@
         </p:nvSpPr>
         <p:spPr>
           <a:xfrm>
-            <a:off x="548640" y="1841500"/>
-            <a:ext cx="5669280" cy="2331720"/>
+            <a:off x="548640" y="1645920"/>
+            <a:ext cx="5669280" cy="2103120"/>
           </a:xfrm>
           <a:prstGeom prst="roundRect">
             <a:avLst/>
@@ -4849,7 +4510,6 @@
           <a:lstStyle/>
           <a:p>
             <a:pPr algn="ctr"/>
-            <a:endParaRPr/>
           </a:p>
         </p:txBody>
       </p:sp>
@@ -4861,8 +4521,8 @@
         </p:nvSpPr>
         <p:spPr>
           <a:xfrm>
-            <a:off x="731520" y="1932940"/>
-            <a:ext cx="5303520" cy="2148840"/>
+            <a:off x="731520" y="1737360"/>
+            <a:ext cx="5303520" cy="1920240"/>
           </a:xfrm>
           <a:prstGeom prst="rect">
             <a:avLst/>
@@ -4879,7 +4539,7 @@
               <a:spcAft>
                 <a:spcPts val="100"/>
               </a:spcAft>
-              <a:defRPr sz="1300">
+              <a:defRPr sz="1800">
                 <a:solidFill>
                   <a:srgbClr val="333333"/>
                 </a:solidFill>
@@ -4895,7 +4555,7 @@
               <a:spcAft>
                 <a:spcPts val="100"/>
               </a:spcAft>
-              <a:defRPr sz="1300">
+              <a:defRPr sz="1800">
                 <a:solidFill>
                   <a:srgbClr val="333333"/>
                 </a:solidFill>
@@ -4903,7 +4563,7 @@
               </a:defRPr>
             </a:pPr>
             <a:r>
-              <a:t>tracker.track_until_cross()</a:t>
+              <a:t>track_until_cross()</a:t>
             </a:r>
           </a:p>
           <a:p>
@@ -4911,21 +4571,20 @@
               <a:spcAft>
                 <a:spcPts val="100"/>
               </a:spcAft>
-              <a:defRPr sz="1300">
+              <a:defRPr sz="1800">
                 <a:solidFill>
                   <a:srgbClr val="333333"/>
                 </a:solidFill>
                 <a:latin typeface="Courier New"/>
               </a:defRPr>
             </a:pPr>
-            <a:endParaRPr/>
           </a:p>
           <a:p>
             <a:pPr>
               <a:spcAft>
                 <a:spcPts val="100"/>
               </a:spcAft>
-              <a:defRPr sz="1300">
+              <a:defRPr sz="1800">
                 <a:solidFill>
                   <a:srgbClr val="333333"/>
                 </a:solidFill>
@@ -4941,7 +4600,7 @@
               <a:spcAft>
                 <a:spcPts val="100"/>
               </a:spcAft>
-              <a:defRPr sz="1300">
+              <a:defRPr sz="1800">
                 <a:solidFill>
                   <a:srgbClr val="333333"/>
                 </a:solidFill>
@@ -4949,7 +4608,7 @@
               </a:defRPr>
             </a:pPr>
             <a:r>
-              <a:t>tracker.drivetrain.straight(3)</a:t>
+              <a:t>clear_intersection()</a:t>
             </a:r>
           </a:p>
           <a:p>
@@ -4957,21 +4616,20 @@
               <a:spcAft>
                 <a:spcPts val="100"/>
               </a:spcAft>
-              <a:defRPr sz="1300">
+              <a:defRPr sz="1800">
                 <a:solidFill>
                   <a:srgbClr val="333333"/>
                 </a:solidFill>
                 <a:latin typeface="Courier New"/>
               </a:defRPr>
             </a:pPr>
-            <a:endParaRPr/>
           </a:p>
           <a:p>
             <a:pPr>
               <a:spcAft>
                 <a:spcPts val="100"/>
               </a:spcAft>
-              <a:defRPr sz="1300">
+              <a:defRPr sz="1800">
                 <a:solidFill>
                   <a:srgbClr val="333333"/>
                 </a:solidFill>
@@ -4987,7 +4645,7 @@
               <a:spcAft>
                 <a:spcPts val="100"/>
               </a:spcAft>
-              <a:defRPr sz="1300">
+              <a:defRPr sz="1800">
                 <a:solidFill>
                   <a:srgbClr val="333333"/>
                 </a:solidFill>
@@ -4995,7 +4653,7 @@
               </a:defRPr>
             </a:pPr>
             <a:r>
-              <a:t>tracker.track_until_cross()</a:t>
+              <a:t>track_until_cross()</a:t>
             </a:r>
           </a:p>
         </p:txBody>
@@ -5008,8 +4666,8 @@
         </p:nvSpPr>
         <p:spPr>
           <a:xfrm>
-            <a:off x="6583680" y="1841500"/>
-            <a:ext cx="5029200" cy="2331720"/>
+            <a:off x="6583680" y="1645920"/>
+            <a:ext cx="5029200" cy="2103120"/>
           </a:xfrm>
           <a:prstGeom prst="rect">
             <a:avLst/>
@@ -5047,7 +4705,7 @@
               </a:defRPr>
             </a:pPr>
             <a:r>
-              <a:t>Drives forward a short distance (3 cm)</a:t>
+              <a:t>Low speed (0.3 effort) — don't go too fast</a:t>
             </a:r>
           </a:p>
           <a:p>
@@ -5063,7 +4721,7 @@
               </a:defRPr>
             </a:pPr>
             <a:r>
-              <a:t>Just enough to move past the cross</a:t>
+              <a:t>Short time (0.3 seconds) — just enough to move past</a:t>
             </a:r>
           </a:p>
           <a:p>
@@ -5079,33 +4737,12 @@
               </a:defRPr>
             </a:pPr>
             <a:r>
-              <a:t>Consistent regardless of battery voltage</a:t>
-            </a:r>
-          </a:p>
-          <a:p>
-            <a:pPr>
-              <a:spcAft>
-                <a:spcPts val="400"/>
-              </a:spcAft>
-              <a:defRPr sz="1600" b="0">
-                <a:solidFill>
-                  <a:srgbClr val="000000"/>
-                </a:solidFill>
-                <a:latin typeface="Calibri"/>
-              </a:defRPr>
-            </a:pPr>
-            <a:r>
-              <a:t>Adjust distance for your grid spacing</a:t>
+              <a:t>Adjust these values for your robot and grid spacing</a:t>
             </a:r>
           </a:p>
         </p:txBody>
       </p:sp>
     </p:spTree>
-    <p:extLst>
-      <p:ext uri="{BB962C8B-B14F-4D97-AF65-F5344CB8AC3E}">
-        <p14:creationId xmlns:p14="http://schemas.microsoft.com/office/powerpoint/2010/main" val="4143219988"/>
-      </p:ext>
-    </p:extLst>
   </p:cSld>
   <p:clrMapOvr>
     <a:masterClrMapping/>
@@ -5114,7 +4751,7 @@
 </file>
 
 <file path=ppt/slides/slide5.xml><?xml version="1.0" encoding="utf-8"?>
-<p:sld xmlns:a="http://schemas.openxmlformats.org/drawingml/2006/main" xmlns:r="http://schemas.openxmlformats.org/officeDocument/2006/relationships" xmlns:p="http://schemas.openxmlformats.org/presentationml/2006/main">
+<p:sld xmlns:a="http://schemas.openxmlformats.org/drawingml/2006/main" xmlns:p="http://schemas.openxmlformats.org/presentationml/2006/main" xmlns:r="http://schemas.openxmlformats.org/officeDocument/2006/relationships">
   <p:cSld>
     <p:spTree>
       <p:nvGrpSpPr>
@@ -5122,14 +4759,7 @@
         <p:cNvGrpSpPr/>
         <p:nvPr/>
       </p:nvGrpSpPr>
-      <p:grpSpPr>
-        <a:xfrm>
-          <a:off x="0" y="0"/>
-          <a:ext cx="0" cy="0"/>
-          <a:chOff x="0" y="0"/>
-          <a:chExt cx="0" cy="0"/>
-        </a:xfrm>
-      </p:grpSpPr>
+      <p:grpSpPr/>
       <p:sp>
         <p:nvSpPr>
           <p:cNvPr id="2" name="Rectangle 1"/>
@@ -5170,7 +4800,6 @@
           <a:lstStyle/>
           <a:p>
             <a:pPr algn="ctr"/>
-            <a:endParaRPr/>
           </a:p>
         </p:txBody>
       </p:sp>
@@ -5259,7 +4888,6 @@
                 <a:latin typeface="Calibri"/>
               </a:defRPr>
             </a:pPr>
-            <a:endParaRPr/>
           </a:p>
         </p:txBody>
       </p:sp>
@@ -5271,8 +4899,8 @@
         </p:nvSpPr>
         <p:spPr>
           <a:xfrm>
-            <a:off x="548640" y="2011680"/>
-            <a:ext cx="10972800" cy="3539114"/>
+            <a:off x="548640" y="1645920"/>
+            <a:ext cx="10972800" cy="3474720"/>
           </a:xfrm>
           <a:prstGeom prst="roundRect">
             <a:avLst/>
@@ -5305,7 +4933,6 @@
           <a:lstStyle/>
           <a:p>
             <a:pPr algn="ctr"/>
-            <a:endParaRPr/>
           </a:p>
         </p:txBody>
       </p:sp>
@@ -5317,8 +4944,8 @@
         </p:nvSpPr>
         <p:spPr>
           <a:xfrm>
-            <a:off x="731520" y="2103120"/>
-            <a:ext cx="10607040" cy="3017520"/>
+            <a:off x="731520" y="1737360"/>
+            <a:ext cx="10607040" cy="3291840"/>
           </a:xfrm>
           <a:prstGeom prst="rect">
             <a:avLst/>
@@ -5335,7 +4962,7 @@
               <a:spcAft>
                 <a:spcPts val="100"/>
               </a:spcAft>
-              <a:defRPr sz="1300">
+              <a:defRPr sz="1800">
                 <a:solidFill>
                   <a:srgbClr val="333333"/>
                 </a:solidFill>
@@ -5343,7 +4970,6 @@
               </a:defRPr>
             </a:pPr>
             <a:r>
-              <a:rPr lang="en-US" dirty="0"/>
               <a:t>board.wait_for_button()</a:t>
             </a:r>
           </a:p>
@@ -5352,21 +4978,20 @@
               <a:spcAft>
                 <a:spcPts val="100"/>
               </a:spcAft>
-              <a:defRPr sz="1300">
+              <a:defRPr sz="1800">
                 <a:solidFill>
                   <a:srgbClr val="333333"/>
                 </a:solidFill>
                 <a:latin typeface="Courier New"/>
               </a:defRPr>
             </a:pPr>
-            <a:endParaRPr lang="en-US" dirty="0"/>
           </a:p>
           <a:p>
             <a:pPr>
               <a:spcAft>
                 <a:spcPts val="100"/>
               </a:spcAft>
-              <a:defRPr sz="1300">
+              <a:defRPr sz="1800">
                 <a:solidFill>
                   <a:srgbClr val="333333"/>
                 </a:solidFill>
@@ -5374,7 +4999,6 @@
               </a:defRPr>
             </a:pPr>
             <a:r>
-              <a:rPr lang="en-US" dirty="0"/>
               <a:t># Intersection 1</a:t>
             </a:r>
           </a:p>
@@ -5383,7 +5007,7 @@
               <a:spcAft>
                 <a:spcPts val="100"/>
               </a:spcAft>
-              <a:defRPr sz="1300">
+              <a:defRPr sz="1800">
                 <a:solidFill>
                   <a:srgbClr val="333333"/>
                 </a:solidFill>
@@ -5391,7 +5015,6 @@
               </a:defRPr>
             </a:pPr>
             <a:r>
-              <a:rPr lang="en-US" dirty="0"/>
               <a:t>print("Driving to intersection 1...")</a:t>
             </a:r>
           </a:p>
@@ -5400,7 +5023,7 @@
               <a:spcAft>
                 <a:spcPts val="100"/>
               </a:spcAft>
-              <a:defRPr sz="1300">
+              <a:defRPr sz="1800">
                 <a:solidFill>
                   <a:srgbClr val="333333"/>
                 </a:solidFill>
@@ -5408,8 +5031,7 @@
               </a:defRPr>
             </a:pPr>
             <a:r>
-              <a:rPr lang="en-US" dirty="0"/>
-              <a:t>tracker.track_until_cross()</a:t>
+              <a:t>track_until_cross()</a:t>
             </a:r>
           </a:p>
           <a:p>
@@ -5417,7 +5039,7 @@
               <a:spcAft>
                 <a:spcPts val="100"/>
               </a:spcAft>
-              <a:defRPr sz="1300">
+              <a:defRPr sz="1800">
                 <a:solidFill>
                   <a:srgbClr val="333333"/>
                 </a:solidFill>
@@ -5425,7 +5047,6 @@
               </a:defRPr>
             </a:pPr>
             <a:r>
-              <a:rPr lang="en-US" dirty="0"/>
               <a:t>print("Reached intersection 1!")</a:t>
             </a:r>
           </a:p>
@@ -5434,21 +5055,20 @@
               <a:spcAft>
                 <a:spcPts val="100"/>
               </a:spcAft>
-              <a:defRPr sz="1300">
+              <a:defRPr sz="1800">
                 <a:solidFill>
                   <a:srgbClr val="333333"/>
                 </a:solidFill>
                 <a:latin typeface="Courier New"/>
               </a:defRPr>
             </a:pPr>
-            <a:endParaRPr lang="en-US" dirty="0"/>
           </a:p>
           <a:p>
             <a:pPr>
               <a:spcAft>
                 <a:spcPts val="100"/>
               </a:spcAft>
-              <a:defRPr sz="1300">
+              <a:defRPr sz="1800">
                 <a:solidFill>
                   <a:srgbClr val="333333"/>
                 </a:solidFill>
@@ -5456,7 +5076,6 @@
               </a:defRPr>
             </a:pPr>
             <a:r>
-              <a:rPr lang="en-US" dirty="0"/>
               <a:t># Clear</a:t>
             </a:r>
           </a:p>
@@ -5465,7 +5084,7 @@
               <a:spcAft>
                 <a:spcPts val="100"/>
               </a:spcAft>
-              <a:defRPr sz="1300">
+              <a:defRPr sz="1800">
                 <a:solidFill>
                   <a:srgbClr val="333333"/>
                 </a:solidFill>
@@ -5473,8 +5092,7 @@
               </a:defRPr>
             </a:pPr>
             <a:r>
-              <a:rPr lang="en-US" dirty="0"/>
-              <a:t>tracker.drivetrain.straight(3)</a:t>
+              <a:t>clear_intersection()</a:t>
             </a:r>
           </a:p>
           <a:p>
@@ -5482,21 +5100,20 @@
               <a:spcAft>
                 <a:spcPts val="100"/>
               </a:spcAft>
-              <a:defRPr sz="1300">
+              <a:defRPr sz="1800">
                 <a:solidFill>
                   <a:srgbClr val="333333"/>
                 </a:solidFill>
                 <a:latin typeface="Courier New"/>
               </a:defRPr>
             </a:pPr>
-            <a:endParaRPr lang="en-US" dirty="0"/>
           </a:p>
           <a:p>
             <a:pPr>
               <a:spcAft>
                 <a:spcPts val="100"/>
               </a:spcAft>
-              <a:defRPr sz="1300">
+              <a:defRPr sz="1800">
                 <a:solidFill>
                   <a:srgbClr val="333333"/>
                 </a:solidFill>
@@ -5504,7 +5121,6 @@
               </a:defRPr>
             </a:pPr>
             <a:r>
-              <a:rPr lang="en-US" dirty="0"/>
               <a:t># Intersection 2</a:t>
             </a:r>
           </a:p>
@@ -5513,7 +5129,7 @@
               <a:spcAft>
                 <a:spcPts val="100"/>
               </a:spcAft>
-              <a:defRPr sz="1300">
+              <a:defRPr sz="1800">
                 <a:solidFill>
                   <a:srgbClr val="333333"/>
                 </a:solidFill>
@@ -5521,7 +5137,6 @@
               </a:defRPr>
             </a:pPr>
             <a:r>
-              <a:rPr lang="en-US" dirty="0"/>
               <a:t>print("Driving to intersection 2...")</a:t>
             </a:r>
           </a:p>
@@ -5530,7 +5145,7 @@
               <a:spcAft>
                 <a:spcPts val="100"/>
               </a:spcAft>
-              <a:defRPr sz="1300">
+              <a:defRPr sz="1800">
                 <a:solidFill>
                   <a:srgbClr val="333333"/>
                 </a:solidFill>
@@ -5538,8 +5153,7 @@
               </a:defRPr>
             </a:pPr>
             <a:r>
-              <a:rPr lang="en-US" dirty="0"/>
-              <a:t>tracker.track_until_cross()</a:t>
+              <a:t>track_until_cross()</a:t>
             </a:r>
           </a:p>
           <a:p>
@@ -5547,7 +5161,7 @@
               <a:spcAft>
                 <a:spcPts val="100"/>
               </a:spcAft>
-              <a:defRPr sz="1300">
+              <a:defRPr sz="1800">
                 <a:solidFill>
                   <a:srgbClr val="333333"/>
                 </a:solidFill>
@@ -5555,7 +5169,6 @@
               </a:defRPr>
             </a:pPr>
             <a:r>
-              <a:rPr lang="en-US" dirty="0"/>
               <a:t>print("Reached intersection 2!")</a:t>
             </a:r>
           </a:p>
@@ -5569,7 +5182,7 @@
         </p:nvSpPr>
         <p:spPr>
           <a:xfrm>
-            <a:off x="548640" y="5687954"/>
+            <a:off x="548640" y="5257800"/>
             <a:ext cx="10972800" cy="365760"/>
           </a:xfrm>
           <a:prstGeom prst="rect">
@@ -5595,7 +5208,6 @@
               </a:defRPr>
             </a:pPr>
             <a:r>
-              <a:rPr dirty="0"/>
               <a:t>This works! But what about 5 intersections? 10?</a:t>
             </a:r>
           </a:p>
@@ -5611,16 +5223,10 @@
                 <a:latin typeface="Calibri"/>
               </a:defRPr>
             </a:pPr>
-            <a:endParaRPr dirty="0"/>
           </a:p>
         </p:txBody>
       </p:sp>
     </p:spTree>
-    <p:extLst>
-      <p:ext uri="{BB962C8B-B14F-4D97-AF65-F5344CB8AC3E}">
-        <p14:creationId xmlns:p14="http://schemas.microsoft.com/office/powerpoint/2010/main" val="996951293"/>
-      </p:ext>
-    </p:extLst>
   </p:cSld>
   <p:clrMapOvr>
     <a:masterClrMapping/>
@@ -5629,7 +5235,7 @@
 </file>
 
 <file path=ppt/slides/slide6.xml><?xml version="1.0" encoding="utf-8"?>
-<p:sld xmlns:a="http://schemas.openxmlformats.org/drawingml/2006/main" xmlns:r="http://schemas.openxmlformats.org/officeDocument/2006/relationships" xmlns:p="http://schemas.openxmlformats.org/presentationml/2006/main">
+<p:sld xmlns:a="http://schemas.openxmlformats.org/drawingml/2006/main" xmlns:p="http://schemas.openxmlformats.org/presentationml/2006/main" xmlns:r="http://schemas.openxmlformats.org/officeDocument/2006/relationships">
   <p:cSld>
     <p:spTree>
       <p:nvGrpSpPr>
@@ -5637,14 +5243,7 @@
         <p:cNvGrpSpPr/>
         <p:nvPr/>
       </p:nvGrpSpPr>
-      <p:grpSpPr>
-        <a:xfrm>
-          <a:off x="0" y="0"/>
-          <a:ext cx="0" cy="0"/>
-          <a:chOff x="0" y="0"/>
-          <a:chExt cx="0" cy="0"/>
-        </a:xfrm>
-      </p:grpSpPr>
+      <p:grpSpPr/>
       <p:sp>
         <p:nvSpPr>
           <p:cNvPr id="2" name="Rectangle 1"/>
@@ -5685,7 +5284,6 @@
           <a:lstStyle/>
           <a:p>
             <a:pPr algn="ctr"/>
-            <a:endParaRPr/>
           </a:p>
         </p:txBody>
       </p:sp>
@@ -5774,7 +5372,6 @@
                 <a:latin typeface="Calibri"/>
               </a:defRPr>
             </a:pPr>
-            <a:endParaRPr/>
           </a:p>
         </p:txBody>
       </p:sp>
@@ -5786,8 +5383,8 @@
         </p:nvSpPr>
         <p:spPr>
           <a:xfrm>
-            <a:off x="548640" y="1841500"/>
-            <a:ext cx="10972800" cy="2788920"/>
+            <a:off x="548640" y="1645920"/>
+            <a:ext cx="10972800" cy="2560320"/>
           </a:xfrm>
           <a:prstGeom prst="roundRect">
             <a:avLst/>
@@ -5820,7 +5417,6 @@
           <a:lstStyle/>
           <a:p>
             <a:pPr algn="ctr"/>
-            <a:endParaRPr/>
           </a:p>
         </p:txBody>
       </p:sp>
@@ -5832,8 +5428,8 @@
         </p:nvSpPr>
         <p:spPr>
           <a:xfrm>
-            <a:off x="731520" y="1932939"/>
-            <a:ext cx="10607040" cy="2606040"/>
+            <a:off x="731520" y="1737360"/>
+            <a:ext cx="10607040" cy="2377440"/>
           </a:xfrm>
           <a:prstGeom prst="rect">
             <a:avLst/>
@@ -5850,7 +5446,7 @@
               <a:spcAft>
                 <a:spcPts val="100"/>
               </a:spcAft>
-              <a:defRPr sz="1300">
+              <a:defRPr sz="1800">
                 <a:solidFill>
                   <a:srgbClr val="333333"/>
                 </a:solidFill>
@@ -5858,7 +5454,6 @@
               </a:defRPr>
             </a:pPr>
             <a:r>
-              <a:rPr lang="en-US" dirty="0"/>
               <a:t>intersections = 3</a:t>
             </a:r>
           </a:p>
@@ -5867,21 +5462,20 @@
               <a:spcAft>
                 <a:spcPts val="100"/>
               </a:spcAft>
-              <a:defRPr sz="1300">
+              <a:defRPr sz="1800">
                 <a:solidFill>
                   <a:srgbClr val="333333"/>
                 </a:solidFill>
                 <a:latin typeface="Courier New"/>
               </a:defRPr>
             </a:pPr>
-            <a:endParaRPr lang="en-US" dirty="0"/>
           </a:p>
           <a:p>
             <a:pPr>
               <a:spcAft>
                 <a:spcPts val="100"/>
               </a:spcAft>
-              <a:defRPr sz="1300">
+              <a:defRPr sz="1800">
                 <a:solidFill>
                   <a:srgbClr val="333333"/>
                 </a:solidFill>
@@ -5889,7 +5483,6 @@
               </a:defRPr>
             </a:pPr>
             <a:r>
-              <a:rPr lang="en-US" dirty="0"/>
               <a:t>for i in range(intersections):</a:t>
             </a:r>
           </a:p>
@@ -5898,7 +5491,7 @@
               <a:spcAft>
                 <a:spcPts val="100"/>
               </a:spcAft>
-              <a:defRPr sz="1300">
+              <a:defRPr sz="1800">
                 <a:solidFill>
                   <a:srgbClr val="333333"/>
                 </a:solidFill>
@@ -5906,7 +5499,6 @@
               </a:defRPr>
             </a:pPr>
             <a:r>
-              <a:rPr lang="en-US" dirty="0"/>
               <a:t>    print("Driving to intersection", i + 1)</a:t>
             </a:r>
           </a:p>
@@ -5915,7 +5507,7 @@
               <a:spcAft>
                 <a:spcPts val="100"/>
               </a:spcAft>
-              <a:defRPr sz="1300">
+              <a:defRPr sz="1800">
                 <a:solidFill>
                   <a:srgbClr val="333333"/>
                 </a:solidFill>
@@ -5923,8 +5515,7 @@
               </a:defRPr>
             </a:pPr>
             <a:r>
-              <a:rPr lang="en-US" dirty="0"/>
-              <a:t>    tracker.track_until_cross()</a:t>
+              <a:t>    track_until_cross()</a:t>
             </a:r>
           </a:p>
           <a:p>
@@ -5932,7 +5523,7 @@
               <a:spcAft>
                 <a:spcPts val="100"/>
               </a:spcAft>
-              <a:defRPr sz="1300">
+              <a:defRPr sz="1800">
                 <a:solidFill>
                   <a:srgbClr val="333333"/>
                 </a:solidFill>
@@ -5940,7 +5531,6 @@
               </a:defRPr>
             </a:pPr>
             <a:r>
-              <a:rPr lang="en-US" dirty="0"/>
               <a:t>    print("Reached intersection", i + 1)</a:t>
             </a:r>
           </a:p>
@@ -5949,21 +5539,20 @@
               <a:spcAft>
                 <a:spcPts val="100"/>
               </a:spcAft>
-              <a:defRPr sz="1300">
+              <a:defRPr sz="1800">
                 <a:solidFill>
                   <a:srgbClr val="333333"/>
                 </a:solidFill>
                 <a:latin typeface="Courier New"/>
               </a:defRPr>
             </a:pPr>
-            <a:endParaRPr lang="en-US" dirty="0"/>
           </a:p>
           <a:p>
             <a:pPr>
               <a:spcAft>
                 <a:spcPts val="100"/>
               </a:spcAft>
-              <a:defRPr sz="1300">
+              <a:defRPr sz="1800">
                 <a:solidFill>
                   <a:srgbClr val="333333"/>
                 </a:solidFill>
@@ -5971,7 +5560,6 @@
               </a:defRPr>
             </a:pPr>
             <a:r>
-              <a:rPr lang="en-US" dirty="0"/>
               <a:t>    # Clear (except after the last one!)</a:t>
             </a:r>
           </a:p>
@@ -5980,7 +5568,7 @@
               <a:spcAft>
                 <a:spcPts val="100"/>
               </a:spcAft>
-              <a:defRPr sz="1300">
+              <a:defRPr sz="1800">
                 <a:solidFill>
                   <a:srgbClr val="333333"/>
                 </a:solidFill>
@@ -5988,7 +5576,6 @@
               </a:defRPr>
             </a:pPr>
             <a:r>
-              <a:rPr lang="en-US" dirty="0"/>
               <a:t>    if i &lt; intersections - 1:</a:t>
             </a:r>
           </a:p>
@@ -5997,7 +5584,7 @@
               <a:spcAft>
                 <a:spcPts val="100"/>
               </a:spcAft>
-              <a:defRPr sz="1300">
+              <a:defRPr sz="1800">
                 <a:solidFill>
                   <a:srgbClr val="333333"/>
                 </a:solidFill>
@@ -6005,8 +5592,7 @@
               </a:defRPr>
             </a:pPr>
             <a:r>
-              <a:rPr lang="en-US" dirty="0"/>
-              <a:t>        tracker.drivetrain.straight(3)</a:t>
+              <a:t>        clear_intersection()</a:t>
             </a:r>
           </a:p>
         </p:txBody>
@@ -6019,7 +5605,7 @@
         </p:nvSpPr>
         <p:spPr>
           <a:xfrm>
-            <a:off x="548640" y="4767580"/>
+            <a:off x="548640" y="4343400"/>
             <a:ext cx="10972800" cy="365760"/>
           </a:xfrm>
           <a:prstGeom prst="rect">
@@ -6092,16 +5678,10 @@
                 <a:latin typeface="Calibri"/>
               </a:defRPr>
             </a:pPr>
-            <a:endParaRPr/>
           </a:p>
         </p:txBody>
       </p:sp>
     </p:spTree>
-    <p:extLst>
-      <p:ext uri="{BB962C8B-B14F-4D97-AF65-F5344CB8AC3E}">
-        <p14:creationId xmlns:p14="http://schemas.microsoft.com/office/powerpoint/2010/main" val="3075764804"/>
-      </p:ext>
-    </p:extLst>
   </p:cSld>
   <p:clrMapOvr>
     <a:masterClrMapping/>
@@ -6110,7 +5690,7 @@
 </file>
 
 <file path=ppt/slides/slide7.xml><?xml version="1.0" encoding="utf-8"?>
-<p:sld xmlns:a="http://schemas.openxmlformats.org/drawingml/2006/main" xmlns:r="http://schemas.openxmlformats.org/officeDocument/2006/relationships" xmlns:p="http://schemas.openxmlformats.org/presentationml/2006/main">
+<p:sld xmlns:a="http://schemas.openxmlformats.org/drawingml/2006/main" xmlns:p="http://schemas.openxmlformats.org/presentationml/2006/main" xmlns:r="http://schemas.openxmlformats.org/officeDocument/2006/relationships">
   <p:cSld>
     <p:spTree>
       <p:nvGrpSpPr>
@@ -6118,14 +5698,7 @@
         <p:cNvGrpSpPr/>
         <p:nvPr/>
       </p:nvGrpSpPr>
-      <p:grpSpPr>
-        <a:xfrm>
-          <a:off x="0" y="0"/>
-          <a:ext cx="0" cy="0"/>
-          <a:chOff x="0" y="0"/>
-          <a:chExt cx="0" cy="0"/>
-        </a:xfrm>
-      </p:grpSpPr>
+      <p:grpSpPr/>
       <p:sp>
         <p:nvSpPr>
           <p:cNvPr id="2" name="Rectangle 1"/>
@@ -6166,7 +5739,6 @@
           <a:lstStyle/>
           <a:p>
             <a:pPr algn="ctr"/>
-            <a:endParaRPr/>
           </a:p>
         </p:txBody>
       </p:sp>
@@ -6255,7 +5827,6 @@
                 <a:latin typeface="Calibri"/>
               </a:defRPr>
             </a:pPr>
-            <a:endParaRPr/>
           </a:p>
         </p:txBody>
       </p:sp>
@@ -6265,16 +5836,10 @@
           <p:cNvGraphicFramePr>
             <a:graphicFrameLocks noGrp="1"/>
           </p:cNvGraphicFramePr>
-          <p:nvPr>
-            <p:extLst>
-              <p:ext uri="{D42A27DB-BD31-4B8C-83A1-F6EECF244321}">
-                <p14:modId xmlns:p14="http://schemas.microsoft.com/office/powerpoint/2010/main" val="507121811"/>
-              </p:ext>
-            </p:extLst>
-          </p:nvPr>
+          <p:nvPr/>
         </p:nvGraphicFramePr>
         <p:xfrm>
-          <a:off x="914400" y="1841500"/>
+          <a:off x="914400" y="1371600"/>
           <a:ext cx="10058400" cy="1463040"/>
         </p:xfrm>
         <a:graphic>
@@ -6284,27 +5849,9 @@
                 <a:tableStyleId>{5C22544A-7EE6-4342-B048-85BDC9FD1C3A}</a:tableStyleId>
               </a:tblPr>
               <a:tblGrid>
-                <a:gridCol w="3352800">
-                  <a:extLst>
-                    <a:ext uri="{9D8B030D-6E8A-4147-A177-3AD203B41FA5}">
-                      <a16:colId xmlns:a16="http://schemas.microsoft.com/office/drawing/2014/main" val="20000"/>
-                    </a:ext>
-                  </a:extLst>
-                </a:gridCol>
-                <a:gridCol w="3352800">
-                  <a:extLst>
-                    <a:ext uri="{9D8B030D-6E8A-4147-A177-3AD203B41FA5}">
-                      <a16:colId xmlns:a16="http://schemas.microsoft.com/office/drawing/2014/main" val="20001"/>
-                    </a:ext>
-                  </a:extLst>
-                </a:gridCol>
-                <a:gridCol w="3352800">
-                  <a:extLst>
-                    <a:ext uri="{9D8B030D-6E8A-4147-A177-3AD203B41FA5}">
-                      <a16:colId xmlns:a16="http://schemas.microsoft.com/office/drawing/2014/main" val="20002"/>
-                    </a:ext>
-                  </a:extLst>
-                </a:gridCol>
+                <a:gridCol w="3352800"/>
+                <a:gridCol w="3352800"/>
+                <a:gridCol w="3352800"/>
               </a:tblGrid>
               <a:tr h="365760">
                 <a:tc>
@@ -6379,11 +5926,6 @@
                     </a:solidFill>
                   </a:tcPr>
                 </a:tc>
-                <a:extLst>
-                  <a:ext uri="{0D108BD9-81ED-4DB2-BD59-A6C34878D82A}">
-                    <a16:rowId xmlns:a16="http://schemas.microsoft.com/office/drawing/2014/main" val="10000"/>
-                  </a:ext>
-                </a:extLst>
               </a:tr>
               <a:tr h="365760">
                 <a:tc>
@@ -6437,11 +5979,6 @@
                   </a:txBody>
                   <a:tcPr/>
                 </a:tc>
-                <a:extLst>
-                  <a:ext uri="{0D108BD9-81ED-4DB2-BD59-A6C34878D82A}">
-                    <a16:rowId xmlns:a16="http://schemas.microsoft.com/office/drawing/2014/main" val="10001"/>
-                  </a:ext>
-                </a:extLst>
               </a:tr>
               <a:tr h="365760">
                 <a:tc>
@@ -6507,11 +6044,6 @@
                     </a:solidFill>
                   </a:tcPr>
                 </a:tc>
-                <a:extLst>
-                  <a:ext uri="{0D108BD9-81ED-4DB2-BD59-A6C34878D82A}">
-                    <a16:rowId xmlns:a16="http://schemas.microsoft.com/office/drawing/2014/main" val="10002"/>
-                  </a:ext>
-                </a:extLst>
               </a:tr>
               <a:tr h="365760">
                 <a:tc>
@@ -6565,11 +6097,6 @@
                   </a:txBody>
                   <a:tcPr/>
                 </a:tc>
-                <a:extLst>
-                  <a:ext uri="{0D108BD9-81ED-4DB2-BD59-A6C34878D82A}">
-                    <a16:rowId xmlns:a16="http://schemas.microsoft.com/office/drawing/2014/main" val="10003"/>
-                  </a:ext>
-                </a:extLst>
               </a:tr>
             </a:tbl>
           </a:graphicData>
@@ -6583,7 +6110,7 @@
         </p:nvSpPr>
         <p:spPr>
           <a:xfrm>
-            <a:off x="548640" y="3487420"/>
+            <a:off x="548640" y="3017520"/>
             <a:ext cx="10972800" cy="365760"/>
           </a:xfrm>
           <a:prstGeom prst="rect">
@@ -6624,7 +6151,6 @@
                 <a:latin typeface="Calibri"/>
               </a:defRPr>
             </a:pPr>
-            <a:endParaRPr/>
           </a:p>
           <a:p>
             <a:pPr>
@@ -6654,7 +6180,6 @@
                 <a:latin typeface="Calibri"/>
               </a:defRPr>
             </a:pPr>
-            <a:endParaRPr/>
           </a:p>
         </p:txBody>
       </p:sp>
@@ -6667,7 +6192,7 @@
 </file>
 
 <file path=ppt/slides/slide8.xml><?xml version="1.0" encoding="utf-8"?>
-<p:sld xmlns:a="http://schemas.openxmlformats.org/drawingml/2006/main" xmlns:r="http://schemas.openxmlformats.org/officeDocument/2006/relationships" xmlns:p="http://schemas.openxmlformats.org/presentationml/2006/main">
+<p:sld xmlns:a="http://schemas.openxmlformats.org/drawingml/2006/main" xmlns:p="http://schemas.openxmlformats.org/presentationml/2006/main" xmlns:r="http://schemas.openxmlformats.org/officeDocument/2006/relationships">
   <p:cSld>
     <p:spTree>
       <p:nvGrpSpPr>
@@ -6675,14 +6200,7 @@
         <p:cNvGrpSpPr/>
         <p:nvPr/>
       </p:nvGrpSpPr>
-      <p:grpSpPr>
-        <a:xfrm>
-          <a:off x="0" y="0"/>
-          <a:ext cx="0" cy="0"/>
-          <a:chOff x="0" y="0"/>
-          <a:chExt cx="0" cy="0"/>
-        </a:xfrm>
-      </p:grpSpPr>
+      <p:grpSpPr/>
       <p:sp>
         <p:nvSpPr>
           <p:cNvPr id="2" name="Rectangle 1"/>
@@ -6723,7 +6241,6 @@
           <a:lstStyle/>
           <a:p>
             <a:pPr algn="ctr"/>
-            <a:endParaRPr/>
           </a:p>
         </p:txBody>
       </p:sp>
@@ -6879,8 +6396,8 @@
         </p:nvSpPr>
         <p:spPr>
           <a:xfrm>
-            <a:off x="548640" y="2374900"/>
-            <a:ext cx="6241100" cy="1645920"/>
+            <a:off x="548640" y="2194560"/>
+            <a:ext cx="5303520" cy="1417320"/>
           </a:xfrm>
           <a:prstGeom prst="roundRect">
             <a:avLst/>
@@ -6913,7 +6430,6 @@
           <a:lstStyle/>
           <a:p>
             <a:pPr algn="ctr"/>
-            <a:endParaRPr/>
           </a:p>
         </p:txBody>
       </p:sp>
@@ -6925,8 +6441,8 @@
         </p:nvSpPr>
         <p:spPr>
           <a:xfrm>
-            <a:off x="731520" y="2463800"/>
-            <a:ext cx="6058220" cy="1356782"/>
+            <a:off x="731520" y="2286000"/>
+            <a:ext cx="4937760" cy="1234440"/>
           </a:xfrm>
           <a:prstGeom prst="rect">
             <a:avLst/>
@@ -6943,7 +6459,7 @@
               <a:spcAft>
                 <a:spcPts val="100"/>
               </a:spcAft>
-              <a:defRPr sz="1300">
+              <a:defRPr sz="1800">
                 <a:solidFill>
                   <a:srgbClr val="333333"/>
                 </a:solidFill>
@@ -6951,8 +6467,7 @@
               </a:defRPr>
             </a:pPr>
             <a:r>
-              <a:rPr lang="en-US" dirty="0"/>
-              <a:t>def drive_intersections(tracker, count):</a:t>
+              <a:t>def drive_intersections(count):</a:t>
             </a:r>
           </a:p>
           <a:p>
@@ -6960,7 +6475,7 @@
               <a:spcAft>
                 <a:spcPts val="100"/>
               </a:spcAft>
-              <a:defRPr sz="1300">
+              <a:defRPr sz="1800">
                 <a:solidFill>
                   <a:srgbClr val="333333"/>
                 </a:solidFill>
@@ -6968,7 +6483,6 @@
               </a:defRPr>
             </a:pPr>
             <a:r>
-              <a:rPr lang="en-US" dirty="0"/>
               <a:t>    for i in range(count):</a:t>
             </a:r>
           </a:p>
@@ -6977,7 +6491,7 @@
               <a:spcAft>
                 <a:spcPts val="100"/>
               </a:spcAft>
-              <a:defRPr sz="1300">
+              <a:defRPr sz="1800">
                 <a:solidFill>
                   <a:srgbClr val="333333"/>
                 </a:solidFill>
@@ -6985,8 +6499,7 @@
               </a:defRPr>
             </a:pPr>
             <a:r>
-              <a:rPr lang="en-US" dirty="0"/>
-              <a:t>        tracker.track_until_cross()</a:t>
+              <a:t>        track_until_cross()</a:t>
             </a:r>
           </a:p>
           <a:p>
@@ -6994,7 +6507,7 @@
               <a:spcAft>
                 <a:spcPts val="100"/>
               </a:spcAft>
-              <a:defRPr sz="1300">
+              <a:defRPr sz="1800">
                 <a:solidFill>
                   <a:srgbClr val="333333"/>
                 </a:solidFill>
@@ -7002,7 +6515,6 @@
               </a:defRPr>
             </a:pPr>
             <a:r>
-              <a:rPr lang="en-US" dirty="0"/>
               <a:t>        if i &lt; count - 1:</a:t>
             </a:r>
           </a:p>
@@ -7011,7 +6523,7 @@
               <a:spcAft>
                 <a:spcPts val="100"/>
               </a:spcAft>
-              <a:defRPr sz="1300">
+              <a:defRPr sz="1800">
                 <a:solidFill>
                   <a:srgbClr val="333333"/>
                 </a:solidFill>
@@ -7019,8 +6531,7 @@
               </a:defRPr>
             </a:pPr>
             <a:r>
-              <a:rPr lang="en-US" dirty="0"/>
-              <a:t>            tracker.drivetrain.straight(3)</a:t>
+              <a:t>            clear_intersection()</a:t>
             </a:r>
           </a:p>
         </p:txBody>
@@ -7033,8 +6544,8 @@
         </p:nvSpPr>
         <p:spPr>
           <a:xfrm>
-            <a:off x="548640" y="4572001"/>
-            <a:ext cx="6241100" cy="1645920"/>
+            <a:off x="6217920" y="2194560"/>
+            <a:ext cx="5303520" cy="1417320"/>
           </a:xfrm>
           <a:prstGeom prst="roundRect">
             <a:avLst/>
@@ -7067,7 +6578,6 @@
           <a:lstStyle/>
           <a:p>
             <a:pPr algn="ctr"/>
-            <a:endParaRPr/>
           </a:p>
         </p:txBody>
       </p:sp>
@@ -7079,8 +6589,8 @@
         </p:nvSpPr>
         <p:spPr>
           <a:xfrm>
-            <a:off x="731519" y="4660901"/>
-            <a:ext cx="6058221" cy="505267"/>
+            <a:off x="6400800" y="2286000"/>
+            <a:ext cx="4937760" cy="1234440"/>
           </a:xfrm>
           <a:prstGeom prst="rect">
             <a:avLst/>
@@ -7097,7 +6607,7 @@
               <a:spcAft>
                 <a:spcPts val="100"/>
               </a:spcAft>
-              <a:defRPr sz="1300">
+              <a:defRPr sz="1800">
                 <a:solidFill>
                   <a:srgbClr val="333333"/>
                 </a:solidFill>
@@ -7105,12 +6615,7 @@
               </a:defRPr>
             </a:pPr>
             <a:r>
-              <a:rPr dirty="0" err="1"/>
-              <a:t>drive_intersections</a:t>
-            </a:r>
-            <a:r>
-              <a:rPr dirty="0"/>
-              <a:t>(tracker, 2)   # Drive 2 intersections</a:t>
+              <a:t>drive_intersections(2)   # Drive 2 intersections</a:t>
             </a:r>
           </a:p>
           <a:p>
@@ -7118,7 +6623,7 @@
               <a:spcAft>
                 <a:spcPts val="100"/>
               </a:spcAft>
-              <a:defRPr sz="1300">
+              <a:defRPr sz="1800">
                 <a:solidFill>
                   <a:srgbClr val="333333"/>
                 </a:solidFill>
@@ -7126,22 +6631,12 @@
               </a:defRPr>
             </a:pPr>
             <a:r>
-              <a:rPr dirty="0" err="1"/>
-              <a:t>drive_intersections</a:t>
-            </a:r>
-            <a:r>
-              <a:rPr dirty="0"/>
-              <a:t>(tracker, 4)   # Drive 4 intersections</a:t>
+              <a:t>drive_intersections(4)   # Drive 4 intersections</a:t>
             </a:r>
           </a:p>
         </p:txBody>
       </p:sp>
     </p:spTree>
-    <p:extLst>
-      <p:ext uri="{BB962C8B-B14F-4D97-AF65-F5344CB8AC3E}">
-        <p14:creationId xmlns:p14="http://schemas.microsoft.com/office/powerpoint/2010/main" val="2844740632"/>
-      </p:ext>
-    </p:extLst>
   </p:cSld>
   <p:clrMapOvr>
     <a:masterClrMapping/>
@@ -7150,7 +6645,7 @@
 </file>
 
 <file path=ppt/slides/slide9.xml><?xml version="1.0" encoding="utf-8"?>
-<p:sld xmlns:a="http://schemas.openxmlformats.org/drawingml/2006/main" xmlns:r="http://schemas.openxmlformats.org/officeDocument/2006/relationships" xmlns:p="http://schemas.openxmlformats.org/presentationml/2006/main">
+<p:sld xmlns:a="http://schemas.openxmlformats.org/drawingml/2006/main" xmlns:p="http://schemas.openxmlformats.org/presentationml/2006/main" xmlns:r="http://schemas.openxmlformats.org/officeDocument/2006/relationships">
   <p:cSld>
     <p:spTree>
       <p:nvGrpSpPr>
@@ -7158,14 +6653,7 @@
         <p:cNvGrpSpPr/>
         <p:nvPr/>
       </p:nvGrpSpPr>
-      <p:grpSpPr>
-        <a:xfrm>
-          <a:off x="0" y="0"/>
-          <a:ext cx="0" cy="0"/>
-          <a:chOff x="0" y="0"/>
-          <a:chExt cx="0" cy="0"/>
-        </a:xfrm>
-      </p:grpSpPr>
+      <p:grpSpPr/>
       <p:sp>
         <p:nvSpPr>
           <p:cNvPr id="2" name="Rectangle 1"/>
@@ -7206,7 +6694,6 @@
           <a:lstStyle/>
           <a:p>
             <a:pPr algn="ctr"/>
-            <a:endParaRPr/>
           </a:p>
         </p:txBody>
       </p:sp>
@@ -7328,7 +6815,7 @@
               </a:defRPr>
             </a:pPr>
             <a:r>
-              <a:t>Create the drive_intersections(tracker, count) function</a:t>
+              <a:t>Create the drive_intersections(count) function</a:t>
             </a:r>
           </a:p>
           <a:p>
@@ -7359,7 +6846,6 @@
                 <a:latin typeface="Calibri"/>
               </a:defRPr>
             </a:pPr>
-            <a:endParaRPr/>
           </a:p>
           <a:p>
             <a:pPr>
@@ -7437,7 +6923,6 @@
                 <a:latin typeface="Calibri"/>
               </a:defRPr>
             </a:pPr>
-            <a:endParaRPr/>
           </a:p>
           <a:p>
             <a:pPr>
@@ -7515,7 +7000,6 @@
                 <a:latin typeface="Calibri"/>
               </a:defRPr>
             </a:pPr>
-            <a:endParaRPr/>
           </a:p>
         </p:txBody>
       </p:sp>
@@ -7845,24 +7329,4 @@
   </a:objectDefaults>
   <a:extraClrSchemeLst/>
 </a:theme>
-</file>
-
-<file path=ppt/webextensions/taskpanes.xml><?xml version="1.0" encoding="utf-8"?>
-<wetp:taskpanes xmlns:wetp="http://schemas.microsoft.com/office/webextensions/taskpanes/2010/11">
-  <wetp:taskpane dockstate="right" visibility="0" width="350" row="0">
-    <wetp:webextensionref xmlns:r="http://schemas.openxmlformats.org/officeDocument/2006/relationships" r:id="rId1"/>
-  </wetp:taskpane>
-</wetp:taskpanes>
-</file>
-
-<file path=ppt/webextensions/webextension1.xml><?xml version="1.0" encoding="utf-8"?>
-<we:webextension xmlns:we="http://schemas.microsoft.com/office/webextensions/webextension/2010/11" id="{AC45371C-A218-3840-8863-245874005D6B}">
-  <we:reference id="WA200010001" version="1.0.0.1" store="Omex" storeType="OMEX"/>
-  <we:alternateReferences>
-    <we:reference id="WA200010001" version="1.0.0.1" store="WA200010001" storeType="OMEX"/>
-  </we:alternateReferences>
-  <we:properties/>
-  <we:bindings/>
-  <we:snapshot xmlns:r="http://schemas.openxmlformats.org/officeDocument/2006/relationships"/>
-</we:webextension>
 </file>